--- a/Mapped Curriculum Lessons/Grade 8/Lesson 31 - Searching 2D Lists/Searching 2D Lists - Slides.pptx
+++ b/Mapped Curriculum Lessons/Grade 8/Lesson 31 - Searching 2D Lists/Searching 2D Lists - Slides.pptx
@@ -2,28 +2,28 @@
 <file path=ppt/presentation.xml><?xml version="1.0" encoding="utf-8"?>
 <p:presentation xmlns:p="http://schemas.openxmlformats.org/presentationml/2006/main" embedTrueTypeFonts="1" saveSubsetFonts="0">
   <p:sldMasterIdLst>
-    <p:sldMasterId xmlns:r="http://schemas.openxmlformats.org/officeDocument/2006/relationships" id="2147483648" r:id="Rc1acb9af2fb64b5d"/>
+    <p:sldMasterId xmlns:r="http://schemas.openxmlformats.org/officeDocument/2006/relationships" id="2147483648" r:id="R8a3877beb74e4c7d"/>
   </p:sldMasterIdLst>
   <p:notesMasterIdLst>
-    <p:notesMasterId xmlns:r="http://schemas.openxmlformats.org/officeDocument/2006/relationships" r:id="R317aeee6f7314c1c"/>
+    <p:notesMasterId xmlns:r="http://schemas.openxmlformats.org/officeDocument/2006/relationships" r:id="R91b25b49fbfe42a7"/>
   </p:notesMasterIdLst>
   <p:sldIdLst>
-    <p:sldId xmlns:r="http://schemas.openxmlformats.org/officeDocument/2006/relationships" id="256" r:id="Rff2b7a898ae34e4a"/>
-    <p:sldId xmlns:r="http://schemas.openxmlformats.org/officeDocument/2006/relationships" id="257" r:id="R964e140cde4b4d44"/>
-    <p:sldId xmlns:r="http://schemas.openxmlformats.org/officeDocument/2006/relationships" id="258" r:id="R19c93ddeece64dcd"/>
-    <p:sldId xmlns:r="http://schemas.openxmlformats.org/officeDocument/2006/relationships" id="259" r:id="Rdfa2fbb9743447a0"/>
-    <p:sldId xmlns:r="http://schemas.openxmlformats.org/officeDocument/2006/relationships" id="260" r:id="Rafe12a0c6abf442d"/>
-    <p:sldId xmlns:r="http://schemas.openxmlformats.org/officeDocument/2006/relationships" id="261" r:id="R6b413c0713024322"/>
-    <p:sldId xmlns:r="http://schemas.openxmlformats.org/officeDocument/2006/relationships" id="262" r:id="Rcd8c92b462ca47a5"/>
-    <p:sldId xmlns:r="http://schemas.openxmlformats.org/officeDocument/2006/relationships" id="263" r:id="R7ba2034414af4548"/>
-    <p:sldId xmlns:r="http://schemas.openxmlformats.org/officeDocument/2006/relationships" id="264" r:id="Rb2660f34632d4efe"/>
+    <p:sldId xmlns:r="http://schemas.openxmlformats.org/officeDocument/2006/relationships" id="256" r:id="R1f0f7f989fc64c51"/>
+    <p:sldId xmlns:r="http://schemas.openxmlformats.org/officeDocument/2006/relationships" id="257" r:id="R423068eef02c47e8"/>
+    <p:sldId xmlns:r="http://schemas.openxmlformats.org/officeDocument/2006/relationships" id="258" r:id="R3da1fe65da1c4921"/>
+    <p:sldId xmlns:r="http://schemas.openxmlformats.org/officeDocument/2006/relationships" id="259" r:id="R5705db9604524ccd"/>
+    <p:sldId xmlns:r="http://schemas.openxmlformats.org/officeDocument/2006/relationships" id="260" r:id="R2303bc34e9bf4ca8"/>
+    <p:sldId xmlns:r="http://schemas.openxmlformats.org/officeDocument/2006/relationships" id="261" r:id="Rdd3e50690d0d4397"/>
+    <p:sldId xmlns:r="http://schemas.openxmlformats.org/officeDocument/2006/relationships" id="262" r:id="Rb550fd10cb544e55"/>
+    <p:sldId xmlns:r="http://schemas.openxmlformats.org/officeDocument/2006/relationships" id="263" r:id="R7a937edd1dff4330"/>
+    <p:sldId xmlns:r="http://schemas.openxmlformats.org/officeDocument/2006/relationships" id="264" r:id="R9ce1fb5e55304b86"/>
   </p:sldIdLst>
   <p:sldSz cx="12192000" cy="6858000"/>
   <p:notesSz cx="6858000" cy="9144000"/>
   <p:embeddedFontLst>
     <p:embeddedFont>
       <p:font typeface="JetBrains Mono"/>
-      <p:regular xmlns:r="http://schemas.openxmlformats.org/officeDocument/2006/relationships" r:id="R3d8f04325cdd425b"/>
+      <p:regular xmlns:r="http://schemas.openxmlformats.org/officeDocument/2006/relationships" r:id="Rd9b1a537861d42ca"/>
     </p:embeddedFont>
   </p:embeddedFontLst>
 </p:presentation>
@@ -1071,7 +1071,7 @@
           <p:nvPr/>
         </p:nvPicPr>
         <p:blipFill rotWithShape="1">
-          <a:blip xmlns:r="http://schemas.openxmlformats.org/officeDocument/2006/relationships" xmlns:a="http://schemas.openxmlformats.org/drawingml/2006/main" r:embed="R538e3676c3504a82"/>
+          <a:blip xmlns:r="http://schemas.openxmlformats.org/officeDocument/2006/relationships" xmlns:a="http://schemas.openxmlformats.org/drawingml/2006/main" r:embed="Reb33a95a2fa04677"/>
           <a:stretch xmlns:a="http://schemas.openxmlformats.org/drawingml/2006/main"/>
         </p:blipFill>
         <p:spPr>
@@ -1451,7 +1451,7 @@
           <p:nvPr/>
         </p:nvPicPr>
         <p:blipFill rotWithShape="1">
-          <a:blip xmlns:r="http://schemas.openxmlformats.org/officeDocument/2006/relationships" xmlns:a="http://schemas.openxmlformats.org/drawingml/2006/main" r:embed="R2377d3fbee384600">
+          <a:blip xmlns:r="http://schemas.openxmlformats.org/officeDocument/2006/relationships" xmlns:a="http://schemas.openxmlformats.org/drawingml/2006/main" r:embed="R8504d039cc584030">
             <a:alphaModFix amt="28000"/>
           </a:blip>
           <a:stretch xmlns:a="http://schemas.openxmlformats.org/drawingml/2006/main"/>
@@ -1664,7 +1664,7 @@
           <p:nvPr/>
         </p:nvPicPr>
         <p:blipFill rotWithShape="1">
-          <a:blip xmlns:r="http://schemas.openxmlformats.org/officeDocument/2006/relationships" xmlns:a="http://schemas.openxmlformats.org/drawingml/2006/main" r:embed="R4df36561d3f943c9">
+          <a:blip xmlns:r="http://schemas.openxmlformats.org/officeDocument/2006/relationships" xmlns:a="http://schemas.openxmlformats.org/drawingml/2006/main" r:embed="Rb03ff7fb522e4f4c">
             <a:alphaModFix amt="28000"/>
           </a:blip>
           <a:stretch xmlns:a="http://schemas.openxmlformats.org/drawingml/2006/main"/>
@@ -1899,7 +1899,7 @@
           <p:nvPr/>
         </p:nvPicPr>
         <p:blipFill rotWithShape="1">
-          <a:blip xmlns:r="http://schemas.openxmlformats.org/officeDocument/2006/relationships" xmlns:a="http://schemas.openxmlformats.org/drawingml/2006/main" r:embed="R90ffa057ed1c4457">
+          <a:blip xmlns:r="http://schemas.openxmlformats.org/officeDocument/2006/relationships" xmlns:a="http://schemas.openxmlformats.org/drawingml/2006/main" r:embed="Rf24ad82bfccb4f36">
             <a:alphaModFix amt="28000"/>
           </a:blip>
           <a:stretch xmlns:a="http://schemas.openxmlformats.org/drawingml/2006/main"/>
@@ -2176,7 +2176,7 @@
           <p:nvPr/>
         </p:nvPicPr>
         <p:blipFill rotWithShape="1">
-          <a:blip xmlns:r="http://schemas.openxmlformats.org/officeDocument/2006/relationships" xmlns:a="http://schemas.openxmlformats.org/drawingml/2006/main" r:embed="R112ad768287944fb">
+          <a:blip xmlns:r="http://schemas.openxmlformats.org/officeDocument/2006/relationships" xmlns:a="http://schemas.openxmlformats.org/drawingml/2006/main" r:embed="Rd33581e415b74827">
             <a:alphaModFix amt="28000"/>
           </a:blip>
           <a:stretch xmlns:a="http://schemas.openxmlformats.org/drawingml/2006/main"/>
@@ -2451,7 +2451,7 @@
           <p:nvPr/>
         </p:nvPicPr>
         <p:blipFill rotWithShape="1">
-          <a:blip xmlns:r="http://schemas.openxmlformats.org/officeDocument/2006/relationships" xmlns:a="http://schemas.openxmlformats.org/drawingml/2006/main" r:embed="R626e5bd816934aa6">
+          <a:blip xmlns:r="http://schemas.openxmlformats.org/officeDocument/2006/relationships" xmlns:a="http://schemas.openxmlformats.org/drawingml/2006/main" r:embed="R4ac5d4de74374149">
             <a:alphaModFix amt="28000"/>
           </a:blip>
           <a:stretch xmlns:a="http://schemas.openxmlformats.org/drawingml/2006/main"/>
@@ -2875,7 +2875,7 @@
           <p:nvPr/>
         </p:nvPicPr>
         <p:blipFill rotWithShape="1">
-          <a:blip xmlns:r="http://schemas.openxmlformats.org/officeDocument/2006/relationships" xmlns:a="http://schemas.openxmlformats.org/drawingml/2006/main" r:embed="Rb7e01268a15c4210">
+          <a:blip xmlns:r="http://schemas.openxmlformats.org/officeDocument/2006/relationships" xmlns:a="http://schemas.openxmlformats.org/drawingml/2006/main" r:embed="R14dfc3242fda403e">
             <a:alphaModFix amt="28000"/>
           </a:blip>
           <a:stretch xmlns:a="http://schemas.openxmlformats.org/drawingml/2006/main"/>
@@ -3016,7 +3016,7 @@
           <p:nvPr/>
         </p:nvPicPr>
         <p:blipFill rotWithShape="1">
-          <a:blip xmlns:r="http://schemas.openxmlformats.org/officeDocument/2006/relationships" xmlns:a="http://schemas.openxmlformats.org/drawingml/2006/main" r:embed="R9e467da6819a497d">
+          <a:blip xmlns:r="http://schemas.openxmlformats.org/officeDocument/2006/relationships" xmlns:a="http://schemas.openxmlformats.org/drawingml/2006/main" r:embed="Rf9da04604fe64c0e">
             <a:alphaModFix amt="28000"/>
           </a:blip>
           <a:stretch xmlns:a="http://schemas.openxmlformats.org/drawingml/2006/main"/>
@@ -3130,7 +3130,7 @@
           <p:nvPr/>
         </p:nvPicPr>
         <p:blipFill rotWithShape="1">
-          <a:blip xmlns:r="http://schemas.openxmlformats.org/officeDocument/2006/relationships" xmlns:a="http://schemas.openxmlformats.org/drawingml/2006/main" r:embed="R6666f1381e4d4efb">
+          <a:blip xmlns:r="http://schemas.openxmlformats.org/officeDocument/2006/relationships" xmlns:a="http://schemas.openxmlformats.org/drawingml/2006/main" r:embed="R623528a1e94f4fbb">
             <a:alphaModFix amt="28000"/>
           </a:blip>
           <a:stretch xmlns:a="http://schemas.openxmlformats.org/drawingml/2006/main"/>
@@ -3457,7 +3457,7 @@
           <p:nvPr/>
         </p:nvPicPr>
         <p:blipFill rotWithShape="1">
-          <a:blip xmlns:r="http://schemas.openxmlformats.org/officeDocument/2006/relationships" xmlns:a="http://schemas.openxmlformats.org/drawingml/2006/main" r:embed="Rfdc49e13d1454221">
+          <a:blip xmlns:r="http://schemas.openxmlformats.org/officeDocument/2006/relationships" xmlns:a="http://schemas.openxmlformats.org/drawingml/2006/main" r:embed="R8ab01d62b78b4a5a">
             <a:alphaModFix amt="28000"/>
           </a:blip>
           <a:stretch xmlns:a="http://schemas.openxmlformats.org/drawingml/2006/main"/>
@@ -3745,7 +3745,7 @@
           <p:nvPr/>
         </p:nvPicPr>
         <p:blipFill rotWithShape="1">
-          <a:blip xmlns:r="http://schemas.openxmlformats.org/officeDocument/2006/relationships" xmlns:a="http://schemas.openxmlformats.org/drawingml/2006/main" r:embed="Rba767dd6899841f4">
+          <a:blip xmlns:r="http://schemas.openxmlformats.org/officeDocument/2006/relationships" xmlns:a="http://schemas.openxmlformats.org/drawingml/2006/main" r:embed="R9c1910cfcd684293">
             <a:alphaModFix amt="28000"/>
           </a:blip>
           <a:stretch xmlns:a="http://schemas.openxmlformats.org/drawingml/2006/main"/>
@@ -3982,17 +3982,17 @@
   </p:cSld>
   <p:clrMap bg1="lt1" tx1="dk1" bg2="lt2" tx2="dk2" accent1="accent1" accent2="accent2" accent3="accent3" accent4="accent4" accent5="accent5" accent6="accent6" hlink="hlink" folHlink="folHlink"/>
   <p:sldLayoutIdLst>
-    <p:sldLayoutId xmlns:r="http://schemas.openxmlformats.org/officeDocument/2006/relationships" id="2147483649" r:id="R3ad6e06b478f4382"/>
-    <p:sldLayoutId xmlns:r="http://schemas.openxmlformats.org/officeDocument/2006/relationships" id="2147483650" r:id="Rdacba525a6874299"/>
-    <p:sldLayoutId xmlns:r="http://schemas.openxmlformats.org/officeDocument/2006/relationships" id="2147483651" r:id="R1fed2e0081794820"/>
-    <p:sldLayoutId xmlns:r="http://schemas.openxmlformats.org/officeDocument/2006/relationships" id="2147483652" r:id="Rcd9c562ed8d34fae"/>
-    <p:sldLayoutId xmlns:r="http://schemas.openxmlformats.org/officeDocument/2006/relationships" id="2147483653" r:id="Rc7d182fe34f648da"/>
-    <p:sldLayoutId xmlns:r="http://schemas.openxmlformats.org/officeDocument/2006/relationships" id="2147483654" r:id="R2dbb610417e14bef"/>
-    <p:sldLayoutId xmlns:r="http://schemas.openxmlformats.org/officeDocument/2006/relationships" id="2147483655" r:id="R8a1bc5177fe64d10"/>
-    <p:sldLayoutId xmlns:r="http://schemas.openxmlformats.org/officeDocument/2006/relationships" id="2147483656" r:id="Rdf4fd8b5da9c4830"/>
-    <p:sldLayoutId xmlns:r="http://schemas.openxmlformats.org/officeDocument/2006/relationships" id="2147483657" r:id="Rec3e81bba130487f"/>
-    <p:sldLayoutId xmlns:r="http://schemas.openxmlformats.org/officeDocument/2006/relationships" id="2147483658" r:id="R751b636665ce45c0"/>
-    <p:sldLayoutId xmlns:r="http://schemas.openxmlformats.org/officeDocument/2006/relationships" id="2147483659" r:id="R3d404b15a25e4527"/>
+    <p:sldLayoutId xmlns:r="http://schemas.openxmlformats.org/officeDocument/2006/relationships" id="2147483649" r:id="Rb89ffde91e3e4143"/>
+    <p:sldLayoutId xmlns:r="http://schemas.openxmlformats.org/officeDocument/2006/relationships" id="2147483650" r:id="R9580430b82634efb"/>
+    <p:sldLayoutId xmlns:r="http://schemas.openxmlformats.org/officeDocument/2006/relationships" id="2147483651" r:id="Ra17b0cd247234ff1"/>
+    <p:sldLayoutId xmlns:r="http://schemas.openxmlformats.org/officeDocument/2006/relationships" id="2147483652" r:id="R67b663d258d142cf"/>
+    <p:sldLayoutId xmlns:r="http://schemas.openxmlformats.org/officeDocument/2006/relationships" id="2147483653" r:id="R0117fe81a4fd42b0"/>
+    <p:sldLayoutId xmlns:r="http://schemas.openxmlformats.org/officeDocument/2006/relationships" id="2147483654" r:id="Ra0cf839382534744"/>
+    <p:sldLayoutId xmlns:r="http://schemas.openxmlformats.org/officeDocument/2006/relationships" id="2147483655" r:id="Ra8a698328e7f444e"/>
+    <p:sldLayoutId xmlns:r="http://schemas.openxmlformats.org/officeDocument/2006/relationships" id="2147483656" r:id="R2e4497602a654b20"/>
+    <p:sldLayoutId xmlns:r="http://schemas.openxmlformats.org/officeDocument/2006/relationships" id="2147483657" r:id="R336943b6e55244c2"/>
+    <p:sldLayoutId xmlns:r="http://schemas.openxmlformats.org/officeDocument/2006/relationships" id="2147483658" r:id="R6fd21d5d759646db"/>
+    <p:sldLayoutId xmlns:r="http://schemas.openxmlformats.org/officeDocument/2006/relationships" id="2147483659" r:id="R5c0de80576ef4d24"/>
   </p:sldLayoutIdLst>
   <p:hf hdr="0" ftr="0" dt="0"/>
   <p:txStyles>

--- a/Mapped Curriculum Lessons/Grade 8/Lesson 31 - Searching 2D Lists/Searching 2D Lists - Slides.pptx
+++ b/Mapped Curriculum Lessons/Grade 8/Lesson 31 - Searching 2D Lists/Searching 2D Lists - Slides.pptx
@@ -2,28 +2,28 @@
 <file path=ppt/presentation.xml><?xml version="1.0" encoding="utf-8"?>
 <p:presentation xmlns:p="http://schemas.openxmlformats.org/presentationml/2006/main" embedTrueTypeFonts="1" saveSubsetFonts="0">
   <p:sldMasterIdLst>
-    <p:sldMasterId xmlns:r="http://schemas.openxmlformats.org/officeDocument/2006/relationships" id="2147483648" r:id="R8a3877beb74e4c7d"/>
+    <p:sldMasterId xmlns:r="http://schemas.openxmlformats.org/officeDocument/2006/relationships" id="2147483648" r:id="R3c75e0afadc24c5f"/>
   </p:sldMasterIdLst>
   <p:notesMasterIdLst>
-    <p:notesMasterId xmlns:r="http://schemas.openxmlformats.org/officeDocument/2006/relationships" r:id="R91b25b49fbfe42a7"/>
+    <p:notesMasterId xmlns:r="http://schemas.openxmlformats.org/officeDocument/2006/relationships" r:id="R2337b3d140384bf8"/>
   </p:notesMasterIdLst>
   <p:sldIdLst>
-    <p:sldId xmlns:r="http://schemas.openxmlformats.org/officeDocument/2006/relationships" id="256" r:id="R1f0f7f989fc64c51"/>
-    <p:sldId xmlns:r="http://schemas.openxmlformats.org/officeDocument/2006/relationships" id="257" r:id="R423068eef02c47e8"/>
-    <p:sldId xmlns:r="http://schemas.openxmlformats.org/officeDocument/2006/relationships" id="258" r:id="R3da1fe65da1c4921"/>
-    <p:sldId xmlns:r="http://schemas.openxmlformats.org/officeDocument/2006/relationships" id="259" r:id="R5705db9604524ccd"/>
-    <p:sldId xmlns:r="http://schemas.openxmlformats.org/officeDocument/2006/relationships" id="260" r:id="R2303bc34e9bf4ca8"/>
-    <p:sldId xmlns:r="http://schemas.openxmlformats.org/officeDocument/2006/relationships" id="261" r:id="Rdd3e50690d0d4397"/>
-    <p:sldId xmlns:r="http://schemas.openxmlformats.org/officeDocument/2006/relationships" id="262" r:id="Rb550fd10cb544e55"/>
-    <p:sldId xmlns:r="http://schemas.openxmlformats.org/officeDocument/2006/relationships" id="263" r:id="R7a937edd1dff4330"/>
-    <p:sldId xmlns:r="http://schemas.openxmlformats.org/officeDocument/2006/relationships" id="264" r:id="R9ce1fb5e55304b86"/>
+    <p:sldId xmlns:r="http://schemas.openxmlformats.org/officeDocument/2006/relationships" id="256" r:id="Rc9e8fb36e86d4bbd"/>
+    <p:sldId xmlns:r="http://schemas.openxmlformats.org/officeDocument/2006/relationships" id="257" r:id="Rad44121a99a94a03"/>
+    <p:sldId xmlns:r="http://schemas.openxmlformats.org/officeDocument/2006/relationships" id="258" r:id="Refc023a127754370"/>
+    <p:sldId xmlns:r="http://schemas.openxmlformats.org/officeDocument/2006/relationships" id="259" r:id="R614646f5678040aa"/>
+    <p:sldId xmlns:r="http://schemas.openxmlformats.org/officeDocument/2006/relationships" id="260" r:id="R7b252bd4b3ce4901"/>
+    <p:sldId xmlns:r="http://schemas.openxmlformats.org/officeDocument/2006/relationships" id="261" r:id="Rd4d5720373c34add"/>
+    <p:sldId xmlns:r="http://schemas.openxmlformats.org/officeDocument/2006/relationships" id="262" r:id="R715a2c276c21472d"/>
+    <p:sldId xmlns:r="http://schemas.openxmlformats.org/officeDocument/2006/relationships" id="263" r:id="Ra82199f39bb74ca9"/>
+    <p:sldId xmlns:r="http://schemas.openxmlformats.org/officeDocument/2006/relationships" id="264" r:id="R70a05a8d3dfb4cee"/>
   </p:sldIdLst>
   <p:sldSz cx="12192000" cy="6858000"/>
   <p:notesSz cx="6858000" cy="9144000"/>
   <p:embeddedFontLst>
     <p:embeddedFont>
       <p:font typeface="JetBrains Mono"/>
-      <p:regular xmlns:r="http://schemas.openxmlformats.org/officeDocument/2006/relationships" r:id="Rd9b1a537861d42ca"/>
+      <p:regular xmlns:r="http://schemas.openxmlformats.org/officeDocument/2006/relationships" r:id="R58a2a1dc3a7d445e"/>
     </p:embeddedFont>
   </p:embeddedFontLst>
 </p:presentation>
@@ -1071,7 +1071,7 @@
           <p:nvPr/>
         </p:nvPicPr>
         <p:blipFill rotWithShape="1">
-          <a:blip xmlns:r="http://schemas.openxmlformats.org/officeDocument/2006/relationships" xmlns:a="http://schemas.openxmlformats.org/drawingml/2006/main" r:embed="Reb33a95a2fa04677"/>
+          <a:blip xmlns:r="http://schemas.openxmlformats.org/officeDocument/2006/relationships" xmlns:a="http://schemas.openxmlformats.org/drawingml/2006/main" r:embed="R15a38cc4b8414f19"/>
           <a:stretch xmlns:a="http://schemas.openxmlformats.org/drawingml/2006/main"/>
         </p:blipFill>
         <p:spPr>
@@ -1451,7 +1451,7 @@
           <p:nvPr/>
         </p:nvPicPr>
         <p:blipFill rotWithShape="1">
-          <a:blip xmlns:r="http://schemas.openxmlformats.org/officeDocument/2006/relationships" xmlns:a="http://schemas.openxmlformats.org/drawingml/2006/main" r:embed="R8504d039cc584030">
+          <a:blip xmlns:r="http://schemas.openxmlformats.org/officeDocument/2006/relationships" xmlns:a="http://schemas.openxmlformats.org/drawingml/2006/main" r:embed="R9e1d71894afd4444">
             <a:alphaModFix amt="28000"/>
           </a:blip>
           <a:stretch xmlns:a="http://schemas.openxmlformats.org/drawingml/2006/main"/>
@@ -1664,7 +1664,7 @@
           <p:nvPr/>
         </p:nvPicPr>
         <p:blipFill rotWithShape="1">
-          <a:blip xmlns:r="http://schemas.openxmlformats.org/officeDocument/2006/relationships" xmlns:a="http://schemas.openxmlformats.org/drawingml/2006/main" r:embed="Rb03ff7fb522e4f4c">
+          <a:blip xmlns:r="http://schemas.openxmlformats.org/officeDocument/2006/relationships" xmlns:a="http://schemas.openxmlformats.org/drawingml/2006/main" r:embed="R84b0ea3d9e4a4e85">
             <a:alphaModFix amt="28000"/>
           </a:blip>
           <a:stretch xmlns:a="http://schemas.openxmlformats.org/drawingml/2006/main"/>
@@ -1899,7 +1899,7 @@
           <p:nvPr/>
         </p:nvPicPr>
         <p:blipFill rotWithShape="1">
-          <a:blip xmlns:r="http://schemas.openxmlformats.org/officeDocument/2006/relationships" xmlns:a="http://schemas.openxmlformats.org/drawingml/2006/main" r:embed="Rf24ad82bfccb4f36">
+          <a:blip xmlns:r="http://schemas.openxmlformats.org/officeDocument/2006/relationships" xmlns:a="http://schemas.openxmlformats.org/drawingml/2006/main" r:embed="Rda00bd1c6ab54a96">
             <a:alphaModFix amt="28000"/>
           </a:blip>
           <a:stretch xmlns:a="http://schemas.openxmlformats.org/drawingml/2006/main"/>
@@ -2176,7 +2176,7 @@
           <p:nvPr/>
         </p:nvPicPr>
         <p:blipFill rotWithShape="1">
-          <a:blip xmlns:r="http://schemas.openxmlformats.org/officeDocument/2006/relationships" xmlns:a="http://schemas.openxmlformats.org/drawingml/2006/main" r:embed="Rd33581e415b74827">
+          <a:blip xmlns:r="http://schemas.openxmlformats.org/officeDocument/2006/relationships" xmlns:a="http://schemas.openxmlformats.org/drawingml/2006/main" r:embed="R5c56fba94ea14c47">
             <a:alphaModFix amt="28000"/>
           </a:blip>
           <a:stretch xmlns:a="http://schemas.openxmlformats.org/drawingml/2006/main"/>
@@ -2451,7 +2451,7 @@
           <p:nvPr/>
         </p:nvPicPr>
         <p:blipFill rotWithShape="1">
-          <a:blip xmlns:r="http://schemas.openxmlformats.org/officeDocument/2006/relationships" xmlns:a="http://schemas.openxmlformats.org/drawingml/2006/main" r:embed="R4ac5d4de74374149">
+          <a:blip xmlns:r="http://schemas.openxmlformats.org/officeDocument/2006/relationships" xmlns:a="http://schemas.openxmlformats.org/drawingml/2006/main" r:embed="R6710d18c8ef14425">
             <a:alphaModFix amt="28000"/>
           </a:blip>
           <a:stretch xmlns:a="http://schemas.openxmlformats.org/drawingml/2006/main"/>
@@ -2875,7 +2875,7 @@
           <p:nvPr/>
         </p:nvPicPr>
         <p:blipFill rotWithShape="1">
-          <a:blip xmlns:r="http://schemas.openxmlformats.org/officeDocument/2006/relationships" xmlns:a="http://schemas.openxmlformats.org/drawingml/2006/main" r:embed="R14dfc3242fda403e">
+          <a:blip xmlns:r="http://schemas.openxmlformats.org/officeDocument/2006/relationships" xmlns:a="http://schemas.openxmlformats.org/drawingml/2006/main" r:embed="R333e8486f8054b42">
             <a:alphaModFix amt="28000"/>
           </a:blip>
           <a:stretch xmlns:a="http://schemas.openxmlformats.org/drawingml/2006/main"/>
@@ -3016,7 +3016,7 @@
           <p:nvPr/>
         </p:nvPicPr>
         <p:blipFill rotWithShape="1">
-          <a:blip xmlns:r="http://schemas.openxmlformats.org/officeDocument/2006/relationships" xmlns:a="http://schemas.openxmlformats.org/drawingml/2006/main" r:embed="Rf9da04604fe64c0e">
+          <a:blip xmlns:r="http://schemas.openxmlformats.org/officeDocument/2006/relationships" xmlns:a="http://schemas.openxmlformats.org/drawingml/2006/main" r:embed="R33aa5547b5214551">
             <a:alphaModFix amt="28000"/>
           </a:blip>
           <a:stretch xmlns:a="http://schemas.openxmlformats.org/drawingml/2006/main"/>
@@ -3130,7 +3130,7 @@
           <p:nvPr/>
         </p:nvPicPr>
         <p:blipFill rotWithShape="1">
-          <a:blip xmlns:r="http://schemas.openxmlformats.org/officeDocument/2006/relationships" xmlns:a="http://schemas.openxmlformats.org/drawingml/2006/main" r:embed="R623528a1e94f4fbb">
+          <a:blip xmlns:r="http://schemas.openxmlformats.org/officeDocument/2006/relationships" xmlns:a="http://schemas.openxmlformats.org/drawingml/2006/main" r:embed="Rb468c9f93c0049ee">
             <a:alphaModFix amt="28000"/>
           </a:blip>
           <a:stretch xmlns:a="http://schemas.openxmlformats.org/drawingml/2006/main"/>
@@ -3457,7 +3457,7 @@
           <p:nvPr/>
         </p:nvPicPr>
         <p:blipFill rotWithShape="1">
-          <a:blip xmlns:r="http://schemas.openxmlformats.org/officeDocument/2006/relationships" xmlns:a="http://schemas.openxmlformats.org/drawingml/2006/main" r:embed="R8ab01d62b78b4a5a">
+          <a:blip xmlns:r="http://schemas.openxmlformats.org/officeDocument/2006/relationships" xmlns:a="http://schemas.openxmlformats.org/drawingml/2006/main" r:embed="R2606df5953524a0e">
             <a:alphaModFix amt="28000"/>
           </a:blip>
           <a:stretch xmlns:a="http://schemas.openxmlformats.org/drawingml/2006/main"/>
@@ -3745,7 +3745,7 @@
           <p:nvPr/>
         </p:nvPicPr>
         <p:blipFill rotWithShape="1">
-          <a:blip xmlns:r="http://schemas.openxmlformats.org/officeDocument/2006/relationships" xmlns:a="http://schemas.openxmlformats.org/drawingml/2006/main" r:embed="R9c1910cfcd684293">
+          <a:blip xmlns:r="http://schemas.openxmlformats.org/officeDocument/2006/relationships" xmlns:a="http://schemas.openxmlformats.org/drawingml/2006/main" r:embed="Rdaf956c39d624788">
             <a:alphaModFix amt="28000"/>
           </a:blip>
           <a:stretch xmlns:a="http://schemas.openxmlformats.org/drawingml/2006/main"/>
@@ -3982,17 +3982,17 @@
   </p:cSld>
   <p:clrMap bg1="lt1" tx1="dk1" bg2="lt2" tx2="dk2" accent1="accent1" accent2="accent2" accent3="accent3" accent4="accent4" accent5="accent5" accent6="accent6" hlink="hlink" folHlink="folHlink"/>
   <p:sldLayoutIdLst>
-    <p:sldLayoutId xmlns:r="http://schemas.openxmlformats.org/officeDocument/2006/relationships" id="2147483649" r:id="Rb89ffde91e3e4143"/>
-    <p:sldLayoutId xmlns:r="http://schemas.openxmlformats.org/officeDocument/2006/relationships" id="2147483650" r:id="R9580430b82634efb"/>
-    <p:sldLayoutId xmlns:r="http://schemas.openxmlformats.org/officeDocument/2006/relationships" id="2147483651" r:id="Ra17b0cd247234ff1"/>
-    <p:sldLayoutId xmlns:r="http://schemas.openxmlformats.org/officeDocument/2006/relationships" id="2147483652" r:id="R67b663d258d142cf"/>
-    <p:sldLayoutId xmlns:r="http://schemas.openxmlformats.org/officeDocument/2006/relationships" id="2147483653" r:id="R0117fe81a4fd42b0"/>
-    <p:sldLayoutId xmlns:r="http://schemas.openxmlformats.org/officeDocument/2006/relationships" id="2147483654" r:id="Ra0cf839382534744"/>
-    <p:sldLayoutId xmlns:r="http://schemas.openxmlformats.org/officeDocument/2006/relationships" id="2147483655" r:id="Ra8a698328e7f444e"/>
-    <p:sldLayoutId xmlns:r="http://schemas.openxmlformats.org/officeDocument/2006/relationships" id="2147483656" r:id="R2e4497602a654b20"/>
-    <p:sldLayoutId xmlns:r="http://schemas.openxmlformats.org/officeDocument/2006/relationships" id="2147483657" r:id="R336943b6e55244c2"/>
-    <p:sldLayoutId xmlns:r="http://schemas.openxmlformats.org/officeDocument/2006/relationships" id="2147483658" r:id="R6fd21d5d759646db"/>
-    <p:sldLayoutId xmlns:r="http://schemas.openxmlformats.org/officeDocument/2006/relationships" id="2147483659" r:id="R5c0de80576ef4d24"/>
+    <p:sldLayoutId xmlns:r="http://schemas.openxmlformats.org/officeDocument/2006/relationships" id="2147483649" r:id="R99d736842e374569"/>
+    <p:sldLayoutId xmlns:r="http://schemas.openxmlformats.org/officeDocument/2006/relationships" id="2147483650" r:id="R24e5255419f64299"/>
+    <p:sldLayoutId xmlns:r="http://schemas.openxmlformats.org/officeDocument/2006/relationships" id="2147483651" r:id="R62b7150918f2457d"/>
+    <p:sldLayoutId xmlns:r="http://schemas.openxmlformats.org/officeDocument/2006/relationships" id="2147483652" r:id="R2a167c569dc84b57"/>
+    <p:sldLayoutId xmlns:r="http://schemas.openxmlformats.org/officeDocument/2006/relationships" id="2147483653" r:id="R537ee68cb36b4938"/>
+    <p:sldLayoutId xmlns:r="http://schemas.openxmlformats.org/officeDocument/2006/relationships" id="2147483654" r:id="Rd5c9574bb75d4359"/>
+    <p:sldLayoutId xmlns:r="http://schemas.openxmlformats.org/officeDocument/2006/relationships" id="2147483655" r:id="Racffae47f4f5496b"/>
+    <p:sldLayoutId xmlns:r="http://schemas.openxmlformats.org/officeDocument/2006/relationships" id="2147483656" r:id="Rad5273cfed4d48a1"/>
+    <p:sldLayoutId xmlns:r="http://schemas.openxmlformats.org/officeDocument/2006/relationships" id="2147483657" r:id="R1b3a965f26a54022"/>
+    <p:sldLayoutId xmlns:r="http://schemas.openxmlformats.org/officeDocument/2006/relationships" id="2147483658" r:id="R70955987e8d944d2"/>
+    <p:sldLayoutId xmlns:r="http://schemas.openxmlformats.org/officeDocument/2006/relationships" id="2147483659" r:id="R9fa2222fd97f4d37"/>
   </p:sldLayoutIdLst>
   <p:hf hdr="0" ftr="0" dt="0"/>
   <p:txStyles>
@@ -9206,7 +9206,106 @@
                 <a:ea typeface="Calibri"/>
                 <a:cs typeface="Calibri"/>
               </a:rPr>
-              <a:t>Extend the matching route to ask for a new member count and update the matched row. Display the updated record. Test two runs: update Chess to 20, then search for Music.</a:t>
+              <a:t>When [club][0] matches [target], ask for a new member count and store it in [new_members]. Update [club][1], then display </a:t>
+            </a:r>
+            <a:r>
+              <a:rPr sz="2400" b="0">
+                <a:solidFill>
+                  <a:srgbClr val="067D17"/>
+                </a:solidFill>
+                <a:latin typeface="JetBrains Mono"/>
+                <a:ea typeface="JetBrains Mono"/>
+                <a:cs typeface="JetBrains Mono"/>
+              </a:rPr>
+              <a:t>"Updated:"</a:t>
+            </a:r>
+            <a:r>
+              <a:rPr sz="2400" b="0">
+                <a:solidFill>
+                  <a:srgbClr val="080808"/>
+                </a:solidFill>
+                <a:latin typeface="Calibri"/>
+                <a:ea typeface="Calibri"/>
+                <a:cs typeface="Calibri"/>
+              </a:rPr>
+              <a:t> followed by the changed row. Test </a:t>
+            </a:r>
+            <a:r>
+              <a:rPr sz="2400" b="0">
+                <a:solidFill>
+                  <a:srgbClr val="067D17"/>
+                </a:solidFill>
+                <a:latin typeface="JetBrains Mono"/>
+                <a:ea typeface="JetBrains Mono"/>
+                <a:cs typeface="JetBrains Mono"/>
+              </a:rPr>
+              <a:t>"Chess"</a:t>
+            </a:r>
+            <a:r>
+              <a:rPr sz="2400" b="0">
+                <a:solidFill>
+                  <a:srgbClr val="080808"/>
+                </a:solidFill>
+                <a:latin typeface="Calibri"/>
+                <a:ea typeface="Calibri"/>
+                <a:cs typeface="Calibri"/>
+              </a:rPr>
+              <a:t> and 20; display </a:t>
+            </a:r>
+            <a:r>
+              <a:rPr sz="2400" b="0">
+                <a:solidFill>
+                  <a:srgbClr val="067D17"/>
+                </a:solidFill>
+                <a:latin typeface="JetBrains Mono"/>
+                <a:ea typeface="JetBrains Mono"/>
+                <a:cs typeface="JetBrains Mono"/>
+              </a:rPr>
+              <a:t>"Updated: ['chess', 20]"</a:t>
+            </a:r>
+            <a:r>
+              <a:rPr sz="2400" b="0">
+                <a:solidFill>
+                  <a:srgbClr val="080808"/>
+                </a:solidFill>
+                <a:latin typeface="Calibri"/>
+                <a:ea typeface="Calibri"/>
+                <a:cs typeface="Calibri"/>
+              </a:rPr>
+              <a:t>. Test </a:t>
+            </a:r>
+            <a:r>
+              <a:rPr sz="2400" b="0">
+                <a:solidFill>
+                  <a:srgbClr val="067D17"/>
+                </a:solidFill>
+                <a:latin typeface="JetBrains Mono"/>
+                <a:ea typeface="JetBrains Mono"/>
+                <a:cs typeface="JetBrains Mono"/>
+              </a:rPr>
+              <a:t>"Music"</a:t>
+            </a:r>
+            <a:r>
+              <a:rPr sz="2400" b="0">
+                <a:solidFill>
+                  <a:srgbClr val="080808"/>
+                </a:solidFill>
+                <a:latin typeface="Calibri"/>
+                <a:ea typeface="Calibri"/>
+                <a:cs typeface="Calibri"/>
+              </a:rPr>
+              <a:t>; display </a:t>
+            </a:r>
+            <a:r>
+              <a:rPr sz="2400" b="0">
+                <a:solidFill>
+                  <a:srgbClr val="067D17"/>
+                </a:solidFill>
+                <a:latin typeface="JetBrains Mono"/>
+                <a:ea typeface="JetBrains Mono"/>
+                <a:cs typeface="JetBrains Mono"/>
+              </a:rPr>
+              <a:t>"Club not found."</a:t>
             </a:r>
           </a:p>
         </p:txBody>
@@ -10114,7 +10213,7 @@
         </p:spPr>
         <p:txBody>
           <a:bodyPr xmlns:a="http://schemas.openxmlformats.org/drawingml/2006/main">
-            <a:normAutofit fontScale="100000"/>
+            <a:normAutofit fontScale="82905"/>
           </a:bodyPr>
           <a:lstStyle xmlns:a="http://schemas.openxmlformats.org/drawingml/2006/main"/>
           <a:p xmlns:a="http://schemas.openxmlformats.org/drawingml/2006/main">
@@ -10133,7 +10232,216 @@
                 <a:ea typeface="Calibri"/>
                 <a:cs typeface="Calibri"/>
               </a:rPr>
-              <a:t>Create a three-record book search with [title, pages] rows. Search case-insensitively by title, display the page count for a match, and display one not-found message only after every row has been checked.</a:t>
+              <a:t>Store [</a:t>
+            </a:r>
+            <a:r>
+              <a:rPr sz="2400" b="0">
+                <a:solidFill>
+                  <a:srgbClr val="067D17"/>
+                </a:solidFill>
+                <a:latin typeface="JetBrains Mono"/>
+                <a:ea typeface="JetBrains Mono"/>
+                <a:cs typeface="JetBrains Mono"/>
+              </a:rPr>
+              <a:t>"orbit"</a:t>
+            </a:r>
+            <a:r>
+              <a:rPr sz="2400" b="0">
+                <a:solidFill>
+                  <a:srgbClr val="080808"/>
+                </a:solidFill>
+                <a:latin typeface="Calibri"/>
+                <a:ea typeface="Calibri"/>
+                <a:cs typeface="Calibri"/>
+              </a:rPr>
+              <a:t>, 120], [</a:t>
+            </a:r>
+            <a:r>
+              <a:rPr sz="2400" b="0">
+                <a:solidFill>
+                  <a:srgbClr val="067D17"/>
+                </a:solidFill>
+                <a:latin typeface="JetBrains Mono"/>
+                <a:ea typeface="JetBrains Mono"/>
+                <a:cs typeface="JetBrains Mono"/>
+              </a:rPr>
+              <a:t>"harbour"</a:t>
+            </a:r>
+            <a:r>
+              <a:rPr sz="2400" b="0">
+                <a:solidFill>
+                  <a:srgbClr val="080808"/>
+                </a:solidFill>
+                <a:latin typeface="Calibri"/>
+                <a:ea typeface="Calibri"/>
+                <a:cs typeface="Calibri"/>
+              </a:rPr>
+              <a:t>, 96] and [</a:t>
+            </a:r>
+            <a:r>
+              <a:rPr sz="2400" b="0">
+                <a:solidFill>
+                  <a:srgbClr val="067D17"/>
+                </a:solidFill>
+                <a:latin typeface="JetBrains Mono"/>
+                <a:ea typeface="JetBrains Mono"/>
+                <a:cs typeface="JetBrains Mono"/>
+              </a:rPr>
+              <a:t>"forest"</a:t>
+            </a:r>
+            <a:r>
+              <a:rPr sz="2400" b="0">
+                <a:solidFill>
+                  <a:srgbClr val="080808"/>
+                </a:solidFill>
+                <a:latin typeface="Calibri"/>
+                <a:ea typeface="Calibri"/>
+                <a:cs typeface="Calibri"/>
+              </a:rPr>
+              <a:t>, 144] in [books]. Ask for a title and store its lower-case value in [target]. Use a </a:t>
+            </a:r>
+            <a:r>
+              <a:rPr sz="2400" b="0">
+                <a:solidFill>
+                  <a:srgbClr val="1750EB"/>
+                </a:solidFill>
+                <a:latin typeface="JetBrains Mono"/>
+                <a:ea typeface="JetBrains Mono"/>
+                <a:cs typeface="JetBrains Mono"/>
+              </a:rPr>
+              <a:t>for</a:t>
+            </a:r>
+            <a:r>
+              <a:rPr sz="2400" b="0">
+                <a:solidFill>
+                  <a:srgbClr val="080808"/>
+                </a:solidFill>
+                <a:latin typeface="Calibri"/>
+                <a:ea typeface="Calibri"/>
+                <a:cs typeface="Calibri"/>
+              </a:rPr>
+              <a:t> loop to compare [target] with each title. Display </a:t>
+            </a:r>
+            <a:r>
+              <a:rPr sz="2400" b="0">
+                <a:solidFill>
+                  <a:srgbClr val="067D17"/>
+                </a:solidFill>
+                <a:latin typeface="JetBrains Mono"/>
+                <a:ea typeface="JetBrains Mono"/>
+                <a:cs typeface="JetBrains Mono"/>
+              </a:rPr>
+              <a:t>"Pages:"</a:t>
+            </a:r>
+            <a:r>
+              <a:rPr sz="2400" b="0">
+                <a:solidFill>
+                  <a:srgbClr val="080808"/>
+                </a:solidFill>
+                <a:latin typeface="Calibri"/>
+                <a:ea typeface="Calibri"/>
+                <a:cs typeface="Calibri"/>
+              </a:rPr>
+              <a:t> followed by the page count when a title matches. Display </a:t>
+            </a:r>
+            <a:r>
+              <a:rPr sz="2400" b="0">
+                <a:solidFill>
+                  <a:srgbClr val="067D17"/>
+                </a:solidFill>
+                <a:latin typeface="JetBrains Mono"/>
+                <a:ea typeface="JetBrains Mono"/>
+                <a:cs typeface="JetBrains Mono"/>
+              </a:rPr>
+              <a:t>"Book not found."</a:t>
+            </a:r>
+            <a:r>
+              <a:rPr sz="2400" b="0">
+                <a:solidFill>
+                  <a:srgbClr val="080808"/>
+                </a:solidFill>
+                <a:latin typeface="Calibri"/>
+                <a:ea typeface="Calibri"/>
+                <a:cs typeface="Calibri"/>
+              </a:rPr>
+              <a:t> only after every row has been checked and no match was found. Test </a:t>
+            </a:r>
+            <a:r>
+              <a:rPr sz="2400" b="0">
+                <a:solidFill>
+                  <a:srgbClr val="067D17"/>
+                </a:solidFill>
+                <a:latin typeface="JetBrains Mono"/>
+                <a:ea typeface="JetBrains Mono"/>
+                <a:cs typeface="JetBrains Mono"/>
+              </a:rPr>
+              <a:t>"Harbour"</a:t>
+            </a:r>
+            <a:r>
+              <a:rPr sz="2400" b="0">
+                <a:solidFill>
+                  <a:srgbClr val="080808"/>
+                </a:solidFill>
+                <a:latin typeface="Calibri"/>
+                <a:ea typeface="Calibri"/>
+                <a:cs typeface="Calibri"/>
+              </a:rPr>
+              <a:t>; display </a:t>
+            </a:r>
+            <a:r>
+              <a:rPr sz="2400" b="0">
+                <a:solidFill>
+                  <a:srgbClr val="067D17"/>
+                </a:solidFill>
+                <a:latin typeface="JetBrains Mono"/>
+                <a:ea typeface="JetBrains Mono"/>
+                <a:cs typeface="JetBrains Mono"/>
+              </a:rPr>
+              <a:t>"Pages: 96"</a:t>
+            </a:r>
+            <a:r>
+              <a:rPr sz="2400" b="0">
+                <a:solidFill>
+                  <a:srgbClr val="080808"/>
+                </a:solidFill>
+                <a:latin typeface="Calibri"/>
+                <a:ea typeface="Calibri"/>
+                <a:cs typeface="Calibri"/>
+              </a:rPr>
+              <a:t>. Test </a:t>
+            </a:r>
+            <a:r>
+              <a:rPr sz="2400" b="0">
+                <a:solidFill>
+                  <a:srgbClr val="067D17"/>
+                </a:solidFill>
+                <a:latin typeface="JetBrains Mono"/>
+                <a:ea typeface="JetBrains Mono"/>
+                <a:cs typeface="JetBrains Mono"/>
+              </a:rPr>
+              <a:t>"Music"</a:t>
+            </a:r>
+            <a:r>
+              <a:rPr sz="2400" b="0">
+                <a:solidFill>
+                  <a:srgbClr val="080808"/>
+                </a:solidFill>
+                <a:latin typeface="Calibri"/>
+                <a:ea typeface="Calibri"/>
+                <a:cs typeface="Calibri"/>
+              </a:rPr>
+              <a:t>; display </a:t>
+            </a:r>
+            <a:r>
+              <a:rPr sz="2400" b="0">
+                <a:solidFill>
+                  <a:srgbClr val="067D17"/>
+                </a:solidFill>
+                <a:latin typeface="JetBrains Mono"/>
+                <a:ea typeface="JetBrains Mono"/>
+                <a:cs typeface="JetBrains Mono"/>
+              </a:rPr>
+              <a:t>"Book not found."</a:t>
             </a:r>
           </a:p>
         </p:txBody>

--- a/Mapped Curriculum Lessons/Grade 8/Lesson 31 - Searching 2D Lists/Searching 2D Lists - Slides.pptx
+++ b/Mapped Curriculum Lessons/Grade 8/Lesson 31 - Searching 2D Lists/Searching 2D Lists - Slides.pptx
@@ -2,28 +2,28 @@
 <file path=ppt/presentation.xml><?xml version="1.0" encoding="utf-8"?>
 <p:presentation xmlns:p="http://schemas.openxmlformats.org/presentationml/2006/main" embedTrueTypeFonts="1" saveSubsetFonts="0">
   <p:sldMasterIdLst>
-    <p:sldMasterId xmlns:r="http://schemas.openxmlformats.org/officeDocument/2006/relationships" id="2147483648" r:id="R3c75e0afadc24c5f"/>
+    <p:sldMasterId xmlns:r="http://schemas.openxmlformats.org/officeDocument/2006/relationships" id="2147483648" r:id="R5b84794669654649"/>
   </p:sldMasterIdLst>
   <p:notesMasterIdLst>
-    <p:notesMasterId xmlns:r="http://schemas.openxmlformats.org/officeDocument/2006/relationships" r:id="R2337b3d140384bf8"/>
+    <p:notesMasterId xmlns:r="http://schemas.openxmlformats.org/officeDocument/2006/relationships" r:id="R1c58faf733ec4f4f"/>
   </p:notesMasterIdLst>
   <p:sldIdLst>
-    <p:sldId xmlns:r="http://schemas.openxmlformats.org/officeDocument/2006/relationships" id="256" r:id="Rc9e8fb36e86d4bbd"/>
-    <p:sldId xmlns:r="http://schemas.openxmlformats.org/officeDocument/2006/relationships" id="257" r:id="Rad44121a99a94a03"/>
-    <p:sldId xmlns:r="http://schemas.openxmlformats.org/officeDocument/2006/relationships" id="258" r:id="Refc023a127754370"/>
-    <p:sldId xmlns:r="http://schemas.openxmlformats.org/officeDocument/2006/relationships" id="259" r:id="R614646f5678040aa"/>
-    <p:sldId xmlns:r="http://schemas.openxmlformats.org/officeDocument/2006/relationships" id="260" r:id="R7b252bd4b3ce4901"/>
-    <p:sldId xmlns:r="http://schemas.openxmlformats.org/officeDocument/2006/relationships" id="261" r:id="Rd4d5720373c34add"/>
-    <p:sldId xmlns:r="http://schemas.openxmlformats.org/officeDocument/2006/relationships" id="262" r:id="R715a2c276c21472d"/>
-    <p:sldId xmlns:r="http://schemas.openxmlformats.org/officeDocument/2006/relationships" id="263" r:id="Ra82199f39bb74ca9"/>
-    <p:sldId xmlns:r="http://schemas.openxmlformats.org/officeDocument/2006/relationships" id="264" r:id="R70a05a8d3dfb4cee"/>
+    <p:sldId xmlns:r="http://schemas.openxmlformats.org/officeDocument/2006/relationships" id="256" r:id="R96dc3911fefc413b"/>
+    <p:sldId xmlns:r="http://schemas.openxmlformats.org/officeDocument/2006/relationships" id="257" r:id="Rdc9f1d1a38554c72"/>
+    <p:sldId xmlns:r="http://schemas.openxmlformats.org/officeDocument/2006/relationships" id="258" r:id="Rbafdb69c9f094e01"/>
+    <p:sldId xmlns:r="http://schemas.openxmlformats.org/officeDocument/2006/relationships" id="259" r:id="R12040a62a31e4a16"/>
+    <p:sldId xmlns:r="http://schemas.openxmlformats.org/officeDocument/2006/relationships" id="260" r:id="Rab4ffe9920e4428f"/>
+    <p:sldId xmlns:r="http://schemas.openxmlformats.org/officeDocument/2006/relationships" id="261" r:id="R3d26ac197cb74b46"/>
+    <p:sldId xmlns:r="http://schemas.openxmlformats.org/officeDocument/2006/relationships" id="262" r:id="R8beb60125c94498a"/>
+    <p:sldId xmlns:r="http://schemas.openxmlformats.org/officeDocument/2006/relationships" id="263" r:id="R677943fba60d435a"/>
+    <p:sldId xmlns:r="http://schemas.openxmlformats.org/officeDocument/2006/relationships" id="264" r:id="Re2f0ab5e86d54b11"/>
   </p:sldIdLst>
   <p:sldSz cx="12192000" cy="6858000"/>
   <p:notesSz cx="6858000" cy="9144000"/>
   <p:embeddedFontLst>
     <p:embeddedFont>
       <p:font typeface="JetBrains Mono"/>
-      <p:regular xmlns:r="http://schemas.openxmlformats.org/officeDocument/2006/relationships" r:id="R58a2a1dc3a7d445e"/>
+      <p:regular xmlns:r="http://schemas.openxmlformats.org/officeDocument/2006/relationships" r:id="R83041ef2436548aa"/>
     </p:embeddedFont>
   </p:embeddedFontLst>
 </p:presentation>
@@ -1071,7 +1071,7 @@
           <p:nvPr/>
         </p:nvPicPr>
         <p:blipFill rotWithShape="1">
-          <a:blip xmlns:r="http://schemas.openxmlformats.org/officeDocument/2006/relationships" xmlns:a="http://schemas.openxmlformats.org/drawingml/2006/main" r:embed="R15a38cc4b8414f19"/>
+          <a:blip xmlns:r="http://schemas.openxmlformats.org/officeDocument/2006/relationships" xmlns:a="http://schemas.openxmlformats.org/drawingml/2006/main" r:embed="R1fc22c1771454781"/>
           <a:stretch xmlns:a="http://schemas.openxmlformats.org/drawingml/2006/main"/>
         </p:blipFill>
         <p:spPr>
@@ -1451,7 +1451,7 @@
           <p:nvPr/>
         </p:nvPicPr>
         <p:blipFill rotWithShape="1">
-          <a:blip xmlns:r="http://schemas.openxmlformats.org/officeDocument/2006/relationships" xmlns:a="http://schemas.openxmlformats.org/drawingml/2006/main" r:embed="R9e1d71894afd4444">
+          <a:blip xmlns:r="http://schemas.openxmlformats.org/officeDocument/2006/relationships" xmlns:a="http://schemas.openxmlformats.org/drawingml/2006/main" r:embed="R4f0d4f776ec54297">
             <a:alphaModFix amt="28000"/>
           </a:blip>
           <a:stretch xmlns:a="http://schemas.openxmlformats.org/drawingml/2006/main"/>
@@ -1664,7 +1664,7 @@
           <p:nvPr/>
         </p:nvPicPr>
         <p:blipFill rotWithShape="1">
-          <a:blip xmlns:r="http://schemas.openxmlformats.org/officeDocument/2006/relationships" xmlns:a="http://schemas.openxmlformats.org/drawingml/2006/main" r:embed="R84b0ea3d9e4a4e85">
+          <a:blip xmlns:r="http://schemas.openxmlformats.org/officeDocument/2006/relationships" xmlns:a="http://schemas.openxmlformats.org/drawingml/2006/main" r:embed="R421bef7b6537492f">
             <a:alphaModFix amt="28000"/>
           </a:blip>
           <a:stretch xmlns:a="http://schemas.openxmlformats.org/drawingml/2006/main"/>
@@ -1899,7 +1899,7 @@
           <p:nvPr/>
         </p:nvPicPr>
         <p:blipFill rotWithShape="1">
-          <a:blip xmlns:r="http://schemas.openxmlformats.org/officeDocument/2006/relationships" xmlns:a="http://schemas.openxmlformats.org/drawingml/2006/main" r:embed="Rda00bd1c6ab54a96">
+          <a:blip xmlns:r="http://schemas.openxmlformats.org/officeDocument/2006/relationships" xmlns:a="http://schemas.openxmlformats.org/drawingml/2006/main" r:embed="Rc07a9c1857084b01">
             <a:alphaModFix amt="28000"/>
           </a:blip>
           <a:stretch xmlns:a="http://schemas.openxmlformats.org/drawingml/2006/main"/>
@@ -2176,7 +2176,7 @@
           <p:nvPr/>
         </p:nvPicPr>
         <p:blipFill rotWithShape="1">
-          <a:blip xmlns:r="http://schemas.openxmlformats.org/officeDocument/2006/relationships" xmlns:a="http://schemas.openxmlformats.org/drawingml/2006/main" r:embed="R5c56fba94ea14c47">
+          <a:blip xmlns:r="http://schemas.openxmlformats.org/officeDocument/2006/relationships" xmlns:a="http://schemas.openxmlformats.org/drawingml/2006/main" r:embed="R0f8f8287d4eb4c2b">
             <a:alphaModFix amt="28000"/>
           </a:blip>
           <a:stretch xmlns:a="http://schemas.openxmlformats.org/drawingml/2006/main"/>
@@ -2451,7 +2451,7 @@
           <p:nvPr/>
         </p:nvPicPr>
         <p:blipFill rotWithShape="1">
-          <a:blip xmlns:r="http://schemas.openxmlformats.org/officeDocument/2006/relationships" xmlns:a="http://schemas.openxmlformats.org/drawingml/2006/main" r:embed="R6710d18c8ef14425">
+          <a:blip xmlns:r="http://schemas.openxmlformats.org/officeDocument/2006/relationships" xmlns:a="http://schemas.openxmlformats.org/drawingml/2006/main" r:embed="R35582136acf64fc0">
             <a:alphaModFix amt="28000"/>
           </a:blip>
           <a:stretch xmlns:a="http://schemas.openxmlformats.org/drawingml/2006/main"/>
@@ -2875,7 +2875,7 @@
           <p:nvPr/>
         </p:nvPicPr>
         <p:blipFill rotWithShape="1">
-          <a:blip xmlns:r="http://schemas.openxmlformats.org/officeDocument/2006/relationships" xmlns:a="http://schemas.openxmlformats.org/drawingml/2006/main" r:embed="R333e8486f8054b42">
+          <a:blip xmlns:r="http://schemas.openxmlformats.org/officeDocument/2006/relationships" xmlns:a="http://schemas.openxmlformats.org/drawingml/2006/main" r:embed="R83a155804c5f48d8">
             <a:alphaModFix amt="28000"/>
           </a:blip>
           <a:stretch xmlns:a="http://schemas.openxmlformats.org/drawingml/2006/main"/>
@@ -3016,7 +3016,7 @@
           <p:nvPr/>
         </p:nvPicPr>
         <p:blipFill rotWithShape="1">
-          <a:blip xmlns:r="http://schemas.openxmlformats.org/officeDocument/2006/relationships" xmlns:a="http://schemas.openxmlformats.org/drawingml/2006/main" r:embed="R33aa5547b5214551">
+          <a:blip xmlns:r="http://schemas.openxmlformats.org/officeDocument/2006/relationships" xmlns:a="http://schemas.openxmlformats.org/drawingml/2006/main" r:embed="Rae93f1ff98db4865">
             <a:alphaModFix amt="28000"/>
           </a:blip>
           <a:stretch xmlns:a="http://schemas.openxmlformats.org/drawingml/2006/main"/>
@@ -3130,7 +3130,7 @@
           <p:nvPr/>
         </p:nvPicPr>
         <p:blipFill rotWithShape="1">
-          <a:blip xmlns:r="http://schemas.openxmlformats.org/officeDocument/2006/relationships" xmlns:a="http://schemas.openxmlformats.org/drawingml/2006/main" r:embed="Rb468c9f93c0049ee">
+          <a:blip xmlns:r="http://schemas.openxmlformats.org/officeDocument/2006/relationships" xmlns:a="http://schemas.openxmlformats.org/drawingml/2006/main" r:embed="R1b5920d207454b0d">
             <a:alphaModFix amt="28000"/>
           </a:blip>
           <a:stretch xmlns:a="http://schemas.openxmlformats.org/drawingml/2006/main"/>
@@ -3457,7 +3457,7 @@
           <p:nvPr/>
         </p:nvPicPr>
         <p:blipFill rotWithShape="1">
-          <a:blip xmlns:r="http://schemas.openxmlformats.org/officeDocument/2006/relationships" xmlns:a="http://schemas.openxmlformats.org/drawingml/2006/main" r:embed="R2606df5953524a0e">
+          <a:blip xmlns:r="http://schemas.openxmlformats.org/officeDocument/2006/relationships" xmlns:a="http://schemas.openxmlformats.org/drawingml/2006/main" r:embed="Rc6fdb6d42b1d4b08">
             <a:alphaModFix amt="28000"/>
           </a:blip>
           <a:stretch xmlns:a="http://schemas.openxmlformats.org/drawingml/2006/main"/>
@@ -3745,7 +3745,7 @@
           <p:nvPr/>
         </p:nvPicPr>
         <p:blipFill rotWithShape="1">
-          <a:blip xmlns:r="http://schemas.openxmlformats.org/officeDocument/2006/relationships" xmlns:a="http://schemas.openxmlformats.org/drawingml/2006/main" r:embed="Rdaf956c39d624788">
+          <a:blip xmlns:r="http://schemas.openxmlformats.org/officeDocument/2006/relationships" xmlns:a="http://schemas.openxmlformats.org/drawingml/2006/main" r:embed="R3494c99c7c544608">
             <a:alphaModFix amt="28000"/>
           </a:blip>
           <a:stretch xmlns:a="http://schemas.openxmlformats.org/drawingml/2006/main"/>
@@ -3982,17 +3982,17 @@
   </p:cSld>
   <p:clrMap bg1="lt1" tx1="dk1" bg2="lt2" tx2="dk2" accent1="accent1" accent2="accent2" accent3="accent3" accent4="accent4" accent5="accent5" accent6="accent6" hlink="hlink" folHlink="folHlink"/>
   <p:sldLayoutIdLst>
-    <p:sldLayoutId xmlns:r="http://schemas.openxmlformats.org/officeDocument/2006/relationships" id="2147483649" r:id="R99d736842e374569"/>
-    <p:sldLayoutId xmlns:r="http://schemas.openxmlformats.org/officeDocument/2006/relationships" id="2147483650" r:id="R24e5255419f64299"/>
-    <p:sldLayoutId xmlns:r="http://schemas.openxmlformats.org/officeDocument/2006/relationships" id="2147483651" r:id="R62b7150918f2457d"/>
-    <p:sldLayoutId xmlns:r="http://schemas.openxmlformats.org/officeDocument/2006/relationships" id="2147483652" r:id="R2a167c569dc84b57"/>
-    <p:sldLayoutId xmlns:r="http://schemas.openxmlformats.org/officeDocument/2006/relationships" id="2147483653" r:id="R537ee68cb36b4938"/>
-    <p:sldLayoutId xmlns:r="http://schemas.openxmlformats.org/officeDocument/2006/relationships" id="2147483654" r:id="Rd5c9574bb75d4359"/>
-    <p:sldLayoutId xmlns:r="http://schemas.openxmlformats.org/officeDocument/2006/relationships" id="2147483655" r:id="Racffae47f4f5496b"/>
-    <p:sldLayoutId xmlns:r="http://schemas.openxmlformats.org/officeDocument/2006/relationships" id="2147483656" r:id="Rad5273cfed4d48a1"/>
-    <p:sldLayoutId xmlns:r="http://schemas.openxmlformats.org/officeDocument/2006/relationships" id="2147483657" r:id="R1b3a965f26a54022"/>
-    <p:sldLayoutId xmlns:r="http://schemas.openxmlformats.org/officeDocument/2006/relationships" id="2147483658" r:id="R70955987e8d944d2"/>
-    <p:sldLayoutId xmlns:r="http://schemas.openxmlformats.org/officeDocument/2006/relationships" id="2147483659" r:id="R9fa2222fd97f4d37"/>
+    <p:sldLayoutId xmlns:r="http://schemas.openxmlformats.org/officeDocument/2006/relationships" id="2147483649" r:id="R9f58fd4af9714b16"/>
+    <p:sldLayoutId xmlns:r="http://schemas.openxmlformats.org/officeDocument/2006/relationships" id="2147483650" r:id="Rc9ab29f0345a494d"/>
+    <p:sldLayoutId xmlns:r="http://schemas.openxmlformats.org/officeDocument/2006/relationships" id="2147483651" r:id="Rabe2c7e9ffdd48dd"/>
+    <p:sldLayoutId xmlns:r="http://schemas.openxmlformats.org/officeDocument/2006/relationships" id="2147483652" r:id="Rbb20063a89d54487"/>
+    <p:sldLayoutId xmlns:r="http://schemas.openxmlformats.org/officeDocument/2006/relationships" id="2147483653" r:id="Rc08889347ef04c3e"/>
+    <p:sldLayoutId xmlns:r="http://schemas.openxmlformats.org/officeDocument/2006/relationships" id="2147483654" r:id="Rd0c384eda5c2421e"/>
+    <p:sldLayoutId xmlns:r="http://schemas.openxmlformats.org/officeDocument/2006/relationships" id="2147483655" r:id="R6588da0055364e00"/>
+    <p:sldLayoutId xmlns:r="http://schemas.openxmlformats.org/officeDocument/2006/relationships" id="2147483656" r:id="R189296406a504701"/>
+    <p:sldLayoutId xmlns:r="http://schemas.openxmlformats.org/officeDocument/2006/relationships" id="2147483657" r:id="R676ecc56059243bb"/>
+    <p:sldLayoutId xmlns:r="http://schemas.openxmlformats.org/officeDocument/2006/relationships" id="2147483658" r:id="R02f528f0e5994599"/>
+    <p:sldLayoutId xmlns:r="http://schemas.openxmlformats.org/officeDocument/2006/relationships" id="2147483659" r:id="Rd5a9334583634aea"/>
   </p:sldLayoutIdLst>
   <p:hf hdr="0" ftr="0" dt="0"/>
   <p:txStyles>
@@ -8257,18 +8257,21 @@
                 <a:ea typeface="Calibri"/>
                 <a:cs typeface="Calibri"/>
               </a:rPr>
-              <a:t>Change the search so the user enters a member count instead of a club name. Display the matching club. Test 15; the program should display </a:t>
-            </a:r>
-            <a:r>
-              <a:rPr sz="2400" b="0">
-                <a:solidFill>
-                  <a:srgbClr val="067D17"/>
-                </a:solidFill>
-                <a:latin typeface="JetBrains Mono"/>
-                <a:ea typeface="JetBrains Mono"/>
-                <a:cs typeface="JetBrains Mono"/>
-              </a:rPr>
-              <a:t>"Club: code"</a:t>
+              <a:t>Change the example so it searches by member count. Ask for a whole number in </a:t>
+            </a:r>
+            <a:r>
+              <a:rPr sz="2050" b="0">
+                <a:solidFill>
+                  <a:srgbClr val="6A1B9A"/>
+                </a:solidFill>
+                <a:highlight>
+                  <a:srgbClr val="ECEAF4"/>
+                </a:highlight>
+                <a:latin typeface="JetBrains Mono"/>
+                <a:ea typeface="JetBrains Mono"/>
+                <a:cs typeface="JetBrains Mono"/>
+              </a:rPr>
+              <a:t> target </a:t>
             </a:r>
             <a:r>
               <a:rPr sz="2400" b="0">
@@ -8279,7 +8282,131 @@
                 <a:ea typeface="Calibri"/>
                 <a:cs typeface="Calibri"/>
               </a:rPr>
-              <a:t>.</a:t>
+              <a:t> with </a:t>
+            </a:r>
+            <a:r>
+              <a:rPr sz="2050" b="0">
+                <a:solidFill>
+                  <a:srgbClr val="1750EB"/>
+                </a:solidFill>
+                <a:latin typeface="JetBrains Mono"/>
+                <a:ea typeface="JetBrains Mono"/>
+                <a:cs typeface="JetBrains Mono"/>
+              </a:rPr>
+              <a:t>int()</a:t>
+            </a:r>
+            <a:r>
+              <a:rPr sz="2400" b="0">
+                <a:solidFill>
+                  <a:srgbClr val="080808"/>
+                </a:solidFill>
+                <a:latin typeface="Calibri"/>
+                <a:ea typeface="Calibri"/>
+                <a:cs typeface="Calibri"/>
+              </a:rPr>
+              <a:t> and remove the </a:t>
+            </a:r>
+            <a:r>
+              <a:rPr sz="2050" b="0">
+                <a:solidFill>
+                  <a:srgbClr val="1750EB"/>
+                </a:solidFill>
+                <a:latin typeface="JetBrains Mono"/>
+                <a:ea typeface="JetBrains Mono"/>
+                <a:cs typeface="JetBrains Mono"/>
+              </a:rPr>
+              <a:t>lower()</a:t>
+            </a:r>
+            <a:r>
+              <a:rPr sz="2400" b="0">
+                <a:solidFill>
+                  <a:srgbClr val="080808"/>
+                </a:solidFill>
+                <a:latin typeface="Calibri"/>
+                <a:ea typeface="Calibri"/>
+                <a:cs typeface="Calibri"/>
+              </a:rPr>
+              <a:t> line. Compare </a:t>
+            </a:r>
+            <a:r>
+              <a:rPr sz="2050" b="0">
+                <a:solidFill>
+                  <a:srgbClr val="6A1B9A"/>
+                </a:solidFill>
+                <a:highlight>
+                  <a:srgbClr val="ECEAF4"/>
+                </a:highlight>
+                <a:latin typeface="JetBrains Mono"/>
+                <a:ea typeface="JetBrains Mono"/>
+                <a:cs typeface="JetBrains Mono"/>
+              </a:rPr>
+              <a:t> target </a:t>
+            </a:r>
+            <a:r>
+              <a:rPr sz="2400" b="0">
+                <a:solidFill>
+                  <a:srgbClr val="080808"/>
+                </a:solidFill>
+                <a:latin typeface="Calibri"/>
+                <a:ea typeface="Calibri"/>
+                <a:cs typeface="Calibri"/>
+              </a:rPr>
+              <a:t> with each row's count and display a match after </a:t>
+            </a:r>
+            <a:r>
+              <a:rPr sz="2050" b="0">
+                <a:solidFill>
+                  <a:srgbClr val="067D17"/>
+                </a:solidFill>
+                <a:latin typeface="JetBrains Mono"/>
+                <a:ea typeface="JetBrains Mono"/>
+                <a:cs typeface="JetBrains Mono"/>
+              </a:rPr>
+              <a:t>"Club:"</a:t>
+            </a:r>
+            <a:r>
+              <a:rPr sz="2400" b="0">
+                <a:solidFill>
+                  <a:srgbClr val="080808"/>
+                </a:solidFill>
+                <a:latin typeface="Calibri"/>
+                <a:ea typeface="Calibri"/>
+                <a:cs typeface="Calibri"/>
+              </a:rPr>
+              <a:t>. For example, 15 displays </a:t>
+            </a:r>
+            <a:r>
+              <a:rPr sz="2050" b="0">
+                <a:solidFill>
+                  <a:srgbClr val="067D17"/>
+                </a:solidFill>
+                <a:latin typeface="JetBrains Mono"/>
+                <a:ea typeface="JetBrains Mono"/>
+                <a:cs typeface="JetBrains Mono"/>
+              </a:rPr>
+              <a:t>"Club: code"</a:t>
+            </a:r>
+            <a:r>
+              <a:rPr sz="2400" b="0">
+                <a:solidFill>
+                  <a:srgbClr val="080808"/>
+                </a:solidFill>
+                <a:latin typeface="Calibri"/>
+                <a:ea typeface="Calibri"/>
+                <a:cs typeface="Calibri"/>
+              </a:rPr>
+              <a:t> and 99 displays </a:t>
+            </a:r>
+            <a:r>
+              <a:rPr sz="2050" b="0">
+                <a:solidFill>
+                  <a:srgbClr val="067D17"/>
+                </a:solidFill>
+                <a:latin typeface="JetBrains Mono"/>
+                <a:ea typeface="JetBrains Mono"/>
+                <a:cs typeface="JetBrains Mono"/>
+              </a:rPr>
+              <a:t>"Club not found."</a:t>
             </a:r>
           </a:p>
         </p:txBody>
@@ -9206,18 +9333,21 @@
                 <a:ea typeface="Calibri"/>
                 <a:cs typeface="Calibri"/>
               </a:rPr>
-              <a:t>When [club][0] matches [target], ask for a new member count and store it in [new_members]. Update [club][1], then display </a:t>
-            </a:r>
-            <a:r>
-              <a:rPr sz="2400" b="0">
-                <a:solidFill>
-                  <a:srgbClr val="067D17"/>
-                </a:solidFill>
-                <a:latin typeface="JetBrains Mono"/>
-                <a:ea typeface="JetBrains Mono"/>
-                <a:cs typeface="JetBrains Mono"/>
-              </a:rPr>
-              <a:t>"Updated:"</a:t>
+              <a:t>Change the example so it updates the club it finds. When a name matches, ask for </a:t>
+            </a:r>
+            <a:r>
+              <a:rPr sz="2050" b="0">
+                <a:solidFill>
+                  <a:srgbClr val="6A1B9A"/>
+                </a:solidFill>
+                <a:highlight>
+                  <a:srgbClr val="ECEAF4"/>
+                </a:highlight>
+                <a:latin typeface="JetBrains Mono"/>
+                <a:ea typeface="JetBrains Mono"/>
+                <a:cs typeface="JetBrains Mono"/>
+              </a:rPr>
+              <a:t> new_members </a:t>
             </a:r>
             <a:r>
               <a:rPr sz="2400" b="0">
@@ -9228,10 +9358,10 @@
                 <a:ea typeface="Calibri"/>
                 <a:cs typeface="Calibri"/>
               </a:rPr>
-              <a:t> followed by the changed row. Test </a:t>
-            </a:r>
-            <a:r>
-              <a:rPr sz="2400" b="0">
+              <a:t>, replace that row's count and display the row after </a:t>
+            </a:r>
+            <a:r>
+              <a:rPr sz="2050" b="0">
                 <a:solidFill>
                   <a:srgbClr val="067D17"/>
                 </a:solidFill>
@@ -9239,7 +9369,7 @@
                 <a:ea typeface="JetBrains Mono"/>
                 <a:cs typeface="JetBrains Mono"/>
               </a:rPr>
-              <a:t>"Chess"</a:t>
+              <a:t>"Updated:"</a:t>
             </a:r>
             <a:r>
               <a:rPr sz="2400" b="0">
@@ -9250,10 +9380,10 @@
                 <a:ea typeface="Calibri"/>
                 <a:cs typeface="Calibri"/>
               </a:rPr>
-              <a:t> and 20; display </a:t>
-            </a:r>
-            <a:r>
-              <a:rPr sz="2400" b="0">
+              <a:t>. For example, </a:t>
+            </a:r>
+            <a:r>
+              <a:rPr sz="2050" b="0">
                 <a:solidFill>
                   <a:srgbClr val="067D17"/>
                 </a:solidFill>
@@ -9261,7 +9391,7 @@
                 <a:ea typeface="JetBrains Mono"/>
                 <a:cs typeface="JetBrains Mono"/>
               </a:rPr>
-              <a:t>"Updated: ['chess', 20]"</a:t>
+              <a:t>"Chess"</a:t>
             </a:r>
             <a:r>
               <a:rPr sz="2400" b="0">
@@ -9272,10 +9402,10 @@
                 <a:ea typeface="Calibri"/>
                 <a:cs typeface="Calibri"/>
               </a:rPr>
-              <a:t>. Test </a:t>
-            </a:r>
-            <a:r>
-              <a:rPr sz="2400" b="0">
+              <a:t> and 20 display </a:t>
+            </a:r>
+            <a:r>
+              <a:rPr sz="2050" b="0">
                 <a:solidFill>
                   <a:srgbClr val="067D17"/>
                 </a:solidFill>
@@ -9283,7 +9413,7 @@
                 <a:ea typeface="JetBrains Mono"/>
                 <a:cs typeface="JetBrains Mono"/>
               </a:rPr>
-              <a:t>"Music"</a:t>
+              <a:t>"Updated: ['chess', 20]"</a:t>
             </a:r>
             <a:r>
               <a:rPr sz="2400" b="0">
@@ -9294,10 +9424,32 @@
                 <a:ea typeface="Calibri"/>
                 <a:cs typeface="Calibri"/>
               </a:rPr>
-              <a:t>; display </a:t>
+              <a:t>; </a:t>
+            </a:r>
+            <a:r>
+              <a:rPr sz="2050" b="0">
+                <a:solidFill>
+                  <a:srgbClr val="067D17"/>
+                </a:solidFill>
+                <a:latin typeface="JetBrains Mono"/>
+                <a:ea typeface="JetBrains Mono"/>
+                <a:cs typeface="JetBrains Mono"/>
+              </a:rPr>
+              <a:t>"Music"</a:t>
             </a:r>
             <a:r>
               <a:rPr sz="2400" b="0">
+                <a:solidFill>
+                  <a:srgbClr val="080808"/>
+                </a:solidFill>
+                <a:latin typeface="Calibri"/>
+                <a:ea typeface="Calibri"/>
+                <a:cs typeface="Calibri"/>
+              </a:rPr>
+              <a:t> displays </a:t>
+            </a:r>
+            <a:r>
+              <a:rPr sz="2050" b="0">
                 <a:solidFill>
                   <a:srgbClr val="067D17"/>
                 </a:solidFill>
@@ -10213,7 +10365,7 @@
         </p:spPr>
         <p:txBody>
           <a:bodyPr xmlns:a="http://schemas.openxmlformats.org/drawingml/2006/main">
-            <a:normAutofit fontScale="82905"/>
+            <a:normAutofit fontScale="97739"/>
           </a:bodyPr>
           <a:lstStyle xmlns:a="http://schemas.openxmlformats.org/drawingml/2006/main"/>
           <a:p xmlns:a="http://schemas.openxmlformats.org/drawingml/2006/main">
@@ -10232,18 +10384,18 @@
                 <a:ea typeface="Calibri"/>
                 <a:cs typeface="Calibri"/>
               </a:rPr>
-              <a:t>Store [</a:t>
-            </a:r>
-            <a:r>
-              <a:rPr sz="2400" b="0">
-                <a:solidFill>
-                  <a:srgbClr val="067D17"/>
-                </a:solidFill>
-                <a:latin typeface="JetBrains Mono"/>
-                <a:ea typeface="JetBrains Mono"/>
-                <a:cs typeface="JetBrains Mono"/>
-              </a:rPr>
-              <a:t>"orbit"</a:t>
+              <a:t>Create a cafe order program with a 2D </a:t>
+            </a:r>
+            <a:r>
+              <a:rPr sz="2050" b="0">
+                <a:solidFill>
+                  <a:srgbClr val="1750EB"/>
+                </a:solidFill>
+                <a:latin typeface="JetBrains Mono"/>
+                <a:ea typeface="JetBrains Mono"/>
+                <a:cs typeface="JetBrains Mono"/>
+              </a:rPr>
+              <a:t>list</a:t>
             </a:r>
             <a:r>
               <a:rPr sz="2400" b="0">
@@ -10254,18 +10406,21 @@
                 <a:ea typeface="Calibri"/>
                 <a:cs typeface="Calibri"/>
               </a:rPr>
-              <a:t>, 120], [</a:t>
-            </a:r>
-            <a:r>
-              <a:rPr sz="2400" b="0">
-                <a:solidFill>
-                  <a:srgbClr val="067D17"/>
-                </a:solidFill>
-                <a:latin typeface="JetBrains Mono"/>
-                <a:ea typeface="JetBrains Mono"/>
-                <a:cs typeface="JetBrains Mono"/>
-              </a:rPr>
-              <a:t>"harbour"</a:t>
+              <a:t> called </a:t>
+            </a:r>
+            <a:r>
+              <a:rPr sz="2050" b="0">
+                <a:solidFill>
+                  <a:srgbClr val="6A1B9A"/>
+                </a:solidFill>
+                <a:highlight>
+                  <a:srgbClr val="ECEAF4"/>
+                </a:highlight>
+                <a:latin typeface="JetBrains Mono"/>
+                <a:ea typeface="JetBrains Mono"/>
+                <a:cs typeface="JetBrains Mono"/>
+              </a:rPr>
+              <a:t> menu </a:t>
             </a:r>
             <a:r>
               <a:rPr sz="2400" b="0">
@@ -10276,10 +10431,10 @@
                 <a:ea typeface="Calibri"/>
                 <a:cs typeface="Calibri"/>
               </a:rPr>
-              <a:t>, 96] and [</a:t>
-            </a:r>
-            <a:r>
-              <a:rPr sz="2400" b="0">
+              <a:t>: [</a:t>
+            </a:r>
+            <a:r>
+              <a:rPr sz="2050" b="0">
                 <a:solidFill>
                   <a:srgbClr val="067D17"/>
                 </a:solidFill>
@@ -10287,7 +10442,7 @@
                 <a:ea typeface="JetBrains Mono"/>
                 <a:cs typeface="JetBrains Mono"/>
               </a:rPr>
-              <a:t>"forest"</a:t>
+              <a:t>"tea"</a:t>
             </a:r>
             <a:r>
               <a:rPr sz="2400" b="0">
@@ -10298,18 +10453,18 @@
                 <a:ea typeface="Calibri"/>
                 <a:cs typeface="Calibri"/>
               </a:rPr>
-              <a:t>, 144] in [books]. Ask for a title and store its lower-case value in [target]. Use a </a:t>
-            </a:r>
-            <a:r>
-              <a:rPr sz="2400" b="0">
-                <a:solidFill>
-                  <a:srgbClr val="1750EB"/>
-                </a:solidFill>
-                <a:latin typeface="JetBrains Mono"/>
-                <a:ea typeface="JetBrains Mono"/>
-                <a:cs typeface="JetBrains Mono"/>
-              </a:rPr>
-              <a:t>for</a:t>
+              <a:t>, 2], [</a:t>
+            </a:r>
+            <a:r>
+              <a:rPr sz="2050" b="0">
+                <a:solidFill>
+                  <a:srgbClr val="067D17"/>
+                </a:solidFill>
+                <a:latin typeface="JetBrains Mono"/>
+                <a:ea typeface="JetBrains Mono"/>
+                <a:cs typeface="JetBrains Mono"/>
+              </a:rPr>
+              <a:t>"cake"</a:t>
             </a:r>
             <a:r>
               <a:rPr sz="2400" b="0">
@@ -10320,10 +10475,10 @@
                 <a:ea typeface="Calibri"/>
                 <a:cs typeface="Calibri"/>
               </a:rPr>
-              <a:t> loop to compare [target] with each title. Display </a:t>
-            </a:r>
-            <a:r>
-              <a:rPr sz="2400" b="0">
+              <a:t>, 3] and [</a:t>
+            </a:r>
+            <a:r>
+              <a:rPr sz="2050" b="0">
                 <a:solidFill>
                   <a:srgbClr val="067D17"/>
                 </a:solidFill>
@@ -10331,7 +10486,7 @@
                 <a:ea typeface="JetBrains Mono"/>
                 <a:cs typeface="JetBrains Mono"/>
               </a:rPr>
-              <a:t>"Pages:"</a:t>
+              <a:t>"soup"</a:t>
             </a:r>
             <a:r>
               <a:rPr sz="2400" b="0">
@@ -10342,18 +10497,18 @@
                 <a:ea typeface="Calibri"/>
                 <a:cs typeface="Calibri"/>
               </a:rPr>
-              <a:t> followed by the page count when a title matches. Display </a:t>
-            </a:r>
-            <a:r>
-              <a:rPr sz="2400" b="0">
-                <a:solidFill>
-                  <a:srgbClr val="067D17"/>
-                </a:solidFill>
-                <a:latin typeface="JetBrains Mono"/>
-                <a:ea typeface="JetBrains Mono"/>
-                <a:cs typeface="JetBrains Mono"/>
-              </a:rPr>
-              <a:t>"Book not found."</a:t>
+              <a:t>, 5]. Ask for an item, use </a:t>
+            </a:r>
+            <a:r>
+              <a:rPr sz="2050" b="0">
+                <a:solidFill>
+                  <a:srgbClr val="1750EB"/>
+                </a:solidFill>
+                <a:latin typeface="JetBrains Mono"/>
+                <a:ea typeface="JetBrains Mono"/>
+                <a:cs typeface="JetBrains Mono"/>
+              </a:rPr>
+              <a:t>lower()</a:t>
             </a:r>
             <a:r>
               <a:rPr sz="2400" b="0">
@@ -10364,18 +10519,18 @@
                 <a:ea typeface="Calibri"/>
                 <a:cs typeface="Calibri"/>
               </a:rPr>
-              <a:t> only after every row has been checked and no match was found. Test </a:t>
-            </a:r>
-            <a:r>
-              <a:rPr sz="2400" b="0">
-                <a:solidFill>
-                  <a:srgbClr val="067D17"/>
-                </a:solidFill>
-                <a:latin typeface="JetBrains Mono"/>
-                <a:ea typeface="JetBrains Mono"/>
-                <a:cs typeface="JetBrains Mono"/>
-              </a:rPr>
-              <a:t>"Harbour"</a:t>
+              <a:t> on it, then ask for a whole-number quantity. Use a </a:t>
+            </a:r>
+            <a:r>
+              <a:rPr sz="2050" b="0">
+                <a:solidFill>
+                  <a:srgbClr val="1750EB"/>
+                </a:solidFill>
+                <a:latin typeface="JetBrains Mono"/>
+                <a:ea typeface="JetBrains Mono"/>
+                <a:cs typeface="JetBrains Mono"/>
+              </a:rPr>
+              <a:t>for</a:t>
             </a:r>
             <a:r>
               <a:rPr sz="2400" b="0">
@@ -10386,10 +10541,10 @@
                 <a:ea typeface="Calibri"/>
                 <a:cs typeface="Calibri"/>
               </a:rPr>
-              <a:t>; display </a:t>
-            </a:r>
-            <a:r>
-              <a:rPr sz="2400" b="0">
+              <a:t> loop to find the item and display </a:t>
+            </a:r>
+            <a:r>
+              <a:rPr sz="2050" b="0">
                 <a:solidFill>
                   <a:srgbClr val="067D17"/>
                 </a:solidFill>
@@ -10397,7 +10552,7 @@
                 <a:ea typeface="JetBrains Mono"/>
                 <a:cs typeface="JetBrains Mono"/>
               </a:rPr>
-              <a:t>"Pages: 96"</a:t>
+              <a:t>"Cost:"</a:t>
             </a:r>
             <a:r>
               <a:rPr sz="2400" b="0">
@@ -10408,10 +10563,10 @@
                 <a:ea typeface="Calibri"/>
                 <a:cs typeface="Calibri"/>
               </a:rPr>
-              <a:t>. Test </a:t>
-            </a:r>
-            <a:r>
-              <a:rPr sz="2400" b="0">
+              <a:t> with its price times the quantity. If nothing matches, display </a:t>
+            </a:r>
+            <a:r>
+              <a:rPr sz="2050" b="0">
                 <a:solidFill>
                   <a:srgbClr val="067D17"/>
                 </a:solidFill>
@@ -10419,7 +10574,7 @@
                 <a:ea typeface="JetBrains Mono"/>
                 <a:cs typeface="JetBrains Mono"/>
               </a:rPr>
-              <a:t>"Music"</a:t>
+              <a:t>"Item not found."</a:t>
             </a:r>
             <a:r>
               <a:rPr sz="2400" b="0">
@@ -10430,18 +10585,7 @@
                 <a:ea typeface="Calibri"/>
                 <a:cs typeface="Calibri"/>
               </a:rPr>
-              <a:t>; display </a:t>
-            </a:r>
-            <a:r>
-              <a:rPr sz="2400" b="0">
-                <a:solidFill>
-                  <a:srgbClr val="067D17"/>
-                </a:solidFill>
-                <a:latin typeface="JetBrains Mono"/>
-                <a:ea typeface="JetBrains Mono"/>
-                <a:cs typeface="JetBrains Mono"/>
-              </a:rPr>
-              <a:t>"Book not found."</a:t>
+              <a:t> after the loop.</a:t>
             </a:r>
           </a:p>
         </p:txBody>

--- a/Mapped Curriculum Lessons/Grade 8/Lesson 31 - Searching 2D Lists/Searching 2D Lists - Slides.pptx
+++ b/Mapped Curriculum Lessons/Grade 8/Lesson 31 - Searching 2D Lists/Searching 2D Lists - Slides.pptx
@@ -2,28 +2,28 @@
 <file path=ppt/presentation.xml><?xml version="1.0" encoding="utf-8"?>
 <p:presentation xmlns:p="http://schemas.openxmlformats.org/presentationml/2006/main" embedTrueTypeFonts="1" saveSubsetFonts="0">
   <p:sldMasterIdLst>
-    <p:sldMasterId xmlns:r="http://schemas.openxmlformats.org/officeDocument/2006/relationships" id="2147483648" r:id="R5b84794669654649"/>
+    <p:sldMasterId xmlns:r="http://schemas.openxmlformats.org/officeDocument/2006/relationships" id="2147483648" r:id="R6097dea67da24bff"/>
   </p:sldMasterIdLst>
   <p:notesMasterIdLst>
-    <p:notesMasterId xmlns:r="http://schemas.openxmlformats.org/officeDocument/2006/relationships" r:id="R1c58faf733ec4f4f"/>
+    <p:notesMasterId xmlns:r="http://schemas.openxmlformats.org/officeDocument/2006/relationships" r:id="R65515b2d262b4a16"/>
   </p:notesMasterIdLst>
   <p:sldIdLst>
-    <p:sldId xmlns:r="http://schemas.openxmlformats.org/officeDocument/2006/relationships" id="256" r:id="R96dc3911fefc413b"/>
-    <p:sldId xmlns:r="http://schemas.openxmlformats.org/officeDocument/2006/relationships" id="257" r:id="Rdc9f1d1a38554c72"/>
-    <p:sldId xmlns:r="http://schemas.openxmlformats.org/officeDocument/2006/relationships" id="258" r:id="Rbafdb69c9f094e01"/>
-    <p:sldId xmlns:r="http://schemas.openxmlformats.org/officeDocument/2006/relationships" id="259" r:id="R12040a62a31e4a16"/>
-    <p:sldId xmlns:r="http://schemas.openxmlformats.org/officeDocument/2006/relationships" id="260" r:id="Rab4ffe9920e4428f"/>
-    <p:sldId xmlns:r="http://schemas.openxmlformats.org/officeDocument/2006/relationships" id="261" r:id="R3d26ac197cb74b46"/>
-    <p:sldId xmlns:r="http://schemas.openxmlformats.org/officeDocument/2006/relationships" id="262" r:id="R8beb60125c94498a"/>
-    <p:sldId xmlns:r="http://schemas.openxmlformats.org/officeDocument/2006/relationships" id="263" r:id="R677943fba60d435a"/>
-    <p:sldId xmlns:r="http://schemas.openxmlformats.org/officeDocument/2006/relationships" id="264" r:id="Re2f0ab5e86d54b11"/>
+    <p:sldId xmlns:r="http://schemas.openxmlformats.org/officeDocument/2006/relationships" id="256" r:id="R7e38c25469724375"/>
+    <p:sldId xmlns:r="http://schemas.openxmlformats.org/officeDocument/2006/relationships" id="257" r:id="R2bd7c76ca4d34fd2"/>
+    <p:sldId xmlns:r="http://schemas.openxmlformats.org/officeDocument/2006/relationships" id="258" r:id="R0e3ac0662f2e47e5"/>
+    <p:sldId xmlns:r="http://schemas.openxmlformats.org/officeDocument/2006/relationships" id="259" r:id="R3f76e786bdd8462d"/>
+    <p:sldId xmlns:r="http://schemas.openxmlformats.org/officeDocument/2006/relationships" id="260" r:id="Rdd4026a2b33e4a57"/>
+    <p:sldId xmlns:r="http://schemas.openxmlformats.org/officeDocument/2006/relationships" id="261" r:id="R39fce1b2dc1f4591"/>
+    <p:sldId xmlns:r="http://schemas.openxmlformats.org/officeDocument/2006/relationships" id="262" r:id="Rb88458a081ec44b6"/>
+    <p:sldId xmlns:r="http://schemas.openxmlformats.org/officeDocument/2006/relationships" id="263" r:id="R9176fd07e6e1468c"/>
+    <p:sldId xmlns:r="http://schemas.openxmlformats.org/officeDocument/2006/relationships" id="264" r:id="R1b6aa762076740aa"/>
   </p:sldIdLst>
   <p:sldSz cx="12192000" cy="6858000"/>
   <p:notesSz cx="6858000" cy="9144000"/>
   <p:embeddedFontLst>
     <p:embeddedFont>
       <p:font typeface="JetBrains Mono"/>
-      <p:regular xmlns:r="http://schemas.openxmlformats.org/officeDocument/2006/relationships" r:id="R83041ef2436548aa"/>
+      <p:regular xmlns:r="http://schemas.openxmlformats.org/officeDocument/2006/relationships" r:id="Rd82229c84b4c4916"/>
     </p:embeddedFont>
   </p:embeddedFontLst>
 </p:presentation>
@@ -1071,7 +1071,7 @@
           <p:nvPr/>
         </p:nvPicPr>
         <p:blipFill rotWithShape="1">
-          <a:blip xmlns:r="http://schemas.openxmlformats.org/officeDocument/2006/relationships" xmlns:a="http://schemas.openxmlformats.org/drawingml/2006/main" r:embed="R1fc22c1771454781"/>
+          <a:blip xmlns:r="http://schemas.openxmlformats.org/officeDocument/2006/relationships" xmlns:a="http://schemas.openxmlformats.org/drawingml/2006/main" r:embed="Rb479a672f74841cc"/>
           <a:stretch xmlns:a="http://schemas.openxmlformats.org/drawingml/2006/main"/>
         </p:blipFill>
         <p:spPr>
@@ -1451,7 +1451,7 @@
           <p:nvPr/>
         </p:nvPicPr>
         <p:blipFill rotWithShape="1">
-          <a:blip xmlns:r="http://schemas.openxmlformats.org/officeDocument/2006/relationships" xmlns:a="http://schemas.openxmlformats.org/drawingml/2006/main" r:embed="R4f0d4f776ec54297">
+          <a:blip xmlns:r="http://schemas.openxmlformats.org/officeDocument/2006/relationships" xmlns:a="http://schemas.openxmlformats.org/drawingml/2006/main" r:embed="R17d4d4bacf824a89">
             <a:alphaModFix amt="28000"/>
           </a:blip>
           <a:stretch xmlns:a="http://schemas.openxmlformats.org/drawingml/2006/main"/>
@@ -1664,7 +1664,7 @@
           <p:nvPr/>
         </p:nvPicPr>
         <p:blipFill rotWithShape="1">
-          <a:blip xmlns:r="http://schemas.openxmlformats.org/officeDocument/2006/relationships" xmlns:a="http://schemas.openxmlformats.org/drawingml/2006/main" r:embed="R421bef7b6537492f">
+          <a:blip xmlns:r="http://schemas.openxmlformats.org/officeDocument/2006/relationships" xmlns:a="http://schemas.openxmlformats.org/drawingml/2006/main" r:embed="R54329926c4504d88">
             <a:alphaModFix amt="28000"/>
           </a:blip>
           <a:stretch xmlns:a="http://schemas.openxmlformats.org/drawingml/2006/main"/>
@@ -1899,7 +1899,7 @@
           <p:nvPr/>
         </p:nvPicPr>
         <p:blipFill rotWithShape="1">
-          <a:blip xmlns:r="http://schemas.openxmlformats.org/officeDocument/2006/relationships" xmlns:a="http://schemas.openxmlformats.org/drawingml/2006/main" r:embed="Rc07a9c1857084b01">
+          <a:blip xmlns:r="http://schemas.openxmlformats.org/officeDocument/2006/relationships" xmlns:a="http://schemas.openxmlformats.org/drawingml/2006/main" r:embed="R96ad2140cd434edd">
             <a:alphaModFix amt="28000"/>
           </a:blip>
           <a:stretch xmlns:a="http://schemas.openxmlformats.org/drawingml/2006/main"/>
@@ -2176,7 +2176,7 @@
           <p:nvPr/>
         </p:nvPicPr>
         <p:blipFill rotWithShape="1">
-          <a:blip xmlns:r="http://schemas.openxmlformats.org/officeDocument/2006/relationships" xmlns:a="http://schemas.openxmlformats.org/drawingml/2006/main" r:embed="R0f8f8287d4eb4c2b">
+          <a:blip xmlns:r="http://schemas.openxmlformats.org/officeDocument/2006/relationships" xmlns:a="http://schemas.openxmlformats.org/drawingml/2006/main" r:embed="Rc8bd050c688b403f">
             <a:alphaModFix amt="28000"/>
           </a:blip>
           <a:stretch xmlns:a="http://schemas.openxmlformats.org/drawingml/2006/main"/>
@@ -2451,7 +2451,7 @@
           <p:nvPr/>
         </p:nvPicPr>
         <p:blipFill rotWithShape="1">
-          <a:blip xmlns:r="http://schemas.openxmlformats.org/officeDocument/2006/relationships" xmlns:a="http://schemas.openxmlformats.org/drawingml/2006/main" r:embed="R35582136acf64fc0">
+          <a:blip xmlns:r="http://schemas.openxmlformats.org/officeDocument/2006/relationships" xmlns:a="http://schemas.openxmlformats.org/drawingml/2006/main" r:embed="R36423a2630f74341">
             <a:alphaModFix amt="28000"/>
           </a:blip>
           <a:stretch xmlns:a="http://schemas.openxmlformats.org/drawingml/2006/main"/>
@@ -2875,7 +2875,7 @@
           <p:nvPr/>
         </p:nvPicPr>
         <p:blipFill rotWithShape="1">
-          <a:blip xmlns:r="http://schemas.openxmlformats.org/officeDocument/2006/relationships" xmlns:a="http://schemas.openxmlformats.org/drawingml/2006/main" r:embed="R83a155804c5f48d8">
+          <a:blip xmlns:r="http://schemas.openxmlformats.org/officeDocument/2006/relationships" xmlns:a="http://schemas.openxmlformats.org/drawingml/2006/main" r:embed="R1d9ff3f09a8b4545">
             <a:alphaModFix amt="28000"/>
           </a:blip>
           <a:stretch xmlns:a="http://schemas.openxmlformats.org/drawingml/2006/main"/>
@@ -3016,7 +3016,7 @@
           <p:nvPr/>
         </p:nvPicPr>
         <p:blipFill rotWithShape="1">
-          <a:blip xmlns:r="http://schemas.openxmlformats.org/officeDocument/2006/relationships" xmlns:a="http://schemas.openxmlformats.org/drawingml/2006/main" r:embed="Rae93f1ff98db4865">
+          <a:blip xmlns:r="http://schemas.openxmlformats.org/officeDocument/2006/relationships" xmlns:a="http://schemas.openxmlformats.org/drawingml/2006/main" r:embed="R83ccc1e454a44708">
             <a:alphaModFix amt="28000"/>
           </a:blip>
           <a:stretch xmlns:a="http://schemas.openxmlformats.org/drawingml/2006/main"/>
@@ -3130,7 +3130,7 @@
           <p:nvPr/>
         </p:nvPicPr>
         <p:blipFill rotWithShape="1">
-          <a:blip xmlns:r="http://schemas.openxmlformats.org/officeDocument/2006/relationships" xmlns:a="http://schemas.openxmlformats.org/drawingml/2006/main" r:embed="R1b5920d207454b0d">
+          <a:blip xmlns:r="http://schemas.openxmlformats.org/officeDocument/2006/relationships" xmlns:a="http://schemas.openxmlformats.org/drawingml/2006/main" r:embed="R4af90b1f89b44601">
             <a:alphaModFix amt="28000"/>
           </a:blip>
           <a:stretch xmlns:a="http://schemas.openxmlformats.org/drawingml/2006/main"/>
@@ -3457,7 +3457,7 @@
           <p:nvPr/>
         </p:nvPicPr>
         <p:blipFill rotWithShape="1">
-          <a:blip xmlns:r="http://schemas.openxmlformats.org/officeDocument/2006/relationships" xmlns:a="http://schemas.openxmlformats.org/drawingml/2006/main" r:embed="Rc6fdb6d42b1d4b08">
+          <a:blip xmlns:r="http://schemas.openxmlformats.org/officeDocument/2006/relationships" xmlns:a="http://schemas.openxmlformats.org/drawingml/2006/main" r:embed="R254cd248131a4b3e">
             <a:alphaModFix amt="28000"/>
           </a:blip>
           <a:stretch xmlns:a="http://schemas.openxmlformats.org/drawingml/2006/main"/>
@@ -3745,7 +3745,7 @@
           <p:nvPr/>
         </p:nvPicPr>
         <p:blipFill rotWithShape="1">
-          <a:blip xmlns:r="http://schemas.openxmlformats.org/officeDocument/2006/relationships" xmlns:a="http://schemas.openxmlformats.org/drawingml/2006/main" r:embed="R3494c99c7c544608">
+          <a:blip xmlns:r="http://schemas.openxmlformats.org/officeDocument/2006/relationships" xmlns:a="http://schemas.openxmlformats.org/drawingml/2006/main" r:embed="Rebf212062ac145e1">
             <a:alphaModFix amt="28000"/>
           </a:blip>
           <a:stretch xmlns:a="http://schemas.openxmlformats.org/drawingml/2006/main"/>
@@ -3982,17 +3982,17 @@
   </p:cSld>
   <p:clrMap bg1="lt1" tx1="dk1" bg2="lt2" tx2="dk2" accent1="accent1" accent2="accent2" accent3="accent3" accent4="accent4" accent5="accent5" accent6="accent6" hlink="hlink" folHlink="folHlink"/>
   <p:sldLayoutIdLst>
-    <p:sldLayoutId xmlns:r="http://schemas.openxmlformats.org/officeDocument/2006/relationships" id="2147483649" r:id="R9f58fd4af9714b16"/>
-    <p:sldLayoutId xmlns:r="http://schemas.openxmlformats.org/officeDocument/2006/relationships" id="2147483650" r:id="Rc9ab29f0345a494d"/>
-    <p:sldLayoutId xmlns:r="http://schemas.openxmlformats.org/officeDocument/2006/relationships" id="2147483651" r:id="Rabe2c7e9ffdd48dd"/>
-    <p:sldLayoutId xmlns:r="http://schemas.openxmlformats.org/officeDocument/2006/relationships" id="2147483652" r:id="Rbb20063a89d54487"/>
-    <p:sldLayoutId xmlns:r="http://schemas.openxmlformats.org/officeDocument/2006/relationships" id="2147483653" r:id="Rc08889347ef04c3e"/>
-    <p:sldLayoutId xmlns:r="http://schemas.openxmlformats.org/officeDocument/2006/relationships" id="2147483654" r:id="Rd0c384eda5c2421e"/>
-    <p:sldLayoutId xmlns:r="http://schemas.openxmlformats.org/officeDocument/2006/relationships" id="2147483655" r:id="R6588da0055364e00"/>
-    <p:sldLayoutId xmlns:r="http://schemas.openxmlformats.org/officeDocument/2006/relationships" id="2147483656" r:id="R189296406a504701"/>
-    <p:sldLayoutId xmlns:r="http://schemas.openxmlformats.org/officeDocument/2006/relationships" id="2147483657" r:id="R676ecc56059243bb"/>
-    <p:sldLayoutId xmlns:r="http://schemas.openxmlformats.org/officeDocument/2006/relationships" id="2147483658" r:id="R02f528f0e5994599"/>
-    <p:sldLayoutId xmlns:r="http://schemas.openxmlformats.org/officeDocument/2006/relationships" id="2147483659" r:id="Rd5a9334583634aea"/>
+    <p:sldLayoutId xmlns:r="http://schemas.openxmlformats.org/officeDocument/2006/relationships" id="2147483649" r:id="Rf3315277801a4629"/>
+    <p:sldLayoutId xmlns:r="http://schemas.openxmlformats.org/officeDocument/2006/relationships" id="2147483650" r:id="Re76af7a9bd4041a7"/>
+    <p:sldLayoutId xmlns:r="http://schemas.openxmlformats.org/officeDocument/2006/relationships" id="2147483651" r:id="Rbffa681064674003"/>
+    <p:sldLayoutId xmlns:r="http://schemas.openxmlformats.org/officeDocument/2006/relationships" id="2147483652" r:id="R5587f4027f284738"/>
+    <p:sldLayoutId xmlns:r="http://schemas.openxmlformats.org/officeDocument/2006/relationships" id="2147483653" r:id="Re9c32cb84f1a44aa"/>
+    <p:sldLayoutId xmlns:r="http://schemas.openxmlformats.org/officeDocument/2006/relationships" id="2147483654" r:id="Rae84c79eb9524de0"/>
+    <p:sldLayoutId xmlns:r="http://schemas.openxmlformats.org/officeDocument/2006/relationships" id="2147483655" r:id="R2a08b4f458b847db"/>
+    <p:sldLayoutId xmlns:r="http://schemas.openxmlformats.org/officeDocument/2006/relationships" id="2147483656" r:id="R4e13dba1802f43a2"/>
+    <p:sldLayoutId xmlns:r="http://schemas.openxmlformats.org/officeDocument/2006/relationships" id="2147483657" r:id="R2204640e5af242ed"/>
+    <p:sldLayoutId xmlns:r="http://schemas.openxmlformats.org/officeDocument/2006/relationships" id="2147483658" r:id="R12342e2e48da4ab4"/>
+    <p:sldLayoutId xmlns:r="http://schemas.openxmlformats.org/officeDocument/2006/relationships" id="2147483659" r:id="R0ac9a34a2a644247"/>
   </p:sldLayoutIdLst>
   <p:hf hdr="0" ftr="0" dt="0"/>
   <p:txStyles>
@@ -5076,7 +5076,7 @@
             <a:r>
               <a:rPr sz="2400">
                 <a:solidFill>
-                  <a:srgbClr val="1750EB"/>
+                  <a:srgbClr val="C45E00"/>
                 </a:solidFill>
                 <a:latin typeface="JetBrains Mono"/>
                 <a:ea typeface="JetBrains Mono"/>
@@ -5095,7 +5095,7 @@
             <a:r>
               <a:rPr sz="2400">
                 <a:solidFill>
-                  <a:srgbClr val="1750EB"/>
+                  <a:srgbClr val="C45E00"/>
                 </a:solidFill>
                 <a:latin typeface="JetBrains Mono"/>
                 <a:ea typeface="JetBrains Mono"/>
@@ -5117,7 +5117,7 @@
             <a:r>
               <a:rPr sz="2400">
                 <a:solidFill>
-                  <a:srgbClr val="1750EB"/>
+                  <a:srgbClr val="C45E00"/>
                 </a:solidFill>
                 <a:latin typeface="JetBrains Mono"/>
                 <a:ea typeface="JetBrains Mono"/>
@@ -5158,7 +5158,7 @@
             <a:r>
               <a:rPr sz="2400">
                 <a:solidFill>
-                  <a:srgbClr val="1750EB"/>
+                  <a:srgbClr val="C45E00"/>
                 </a:solidFill>
                 <a:latin typeface="JetBrains Mono"/>
                 <a:ea typeface="JetBrains Mono"/>
@@ -5284,7 +5284,7 @@
             <a:r>
               <a:rPr sz="2400">
                 <a:solidFill>
-                  <a:srgbClr val="1750EB"/>
+                  <a:srgbClr val="C45E00"/>
                 </a:solidFill>
                 <a:latin typeface="JetBrains Mono"/>
                 <a:ea typeface="JetBrains Mono"/>
@@ -5303,7 +5303,7 @@
             <a:r>
               <a:rPr sz="2400">
                 <a:solidFill>
-                  <a:srgbClr val="1750EB"/>
+                  <a:srgbClr val="C45E00"/>
                 </a:solidFill>
                 <a:latin typeface="JetBrains Mono"/>
                 <a:ea typeface="JetBrains Mono"/>
@@ -5347,7 +5347,7 @@
             <a:r>
               <a:rPr sz="2400">
                 <a:solidFill>
-                  <a:srgbClr val="1750EB"/>
+                  <a:srgbClr val="C45E00"/>
                 </a:solidFill>
                 <a:latin typeface="JetBrains Mono"/>
                 <a:ea typeface="JetBrains Mono"/>
@@ -5895,7 +5895,7 @@
             <a:r>
               <a:rPr sz="2400">
                 <a:solidFill>
-                  <a:srgbClr val="1750EB"/>
+                  <a:srgbClr val="C45E00"/>
                 </a:solidFill>
                 <a:latin typeface="JetBrains Mono"/>
                 <a:ea typeface="JetBrains Mono"/>
@@ -5914,7 +5914,7 @@
             <a:r>
               <a:rPr sz="2400">
                 <a:solidFill>
-                  <a:srgbClr val="1750EB"/>
+                  <a:srgbClr val="C45E00"/>
                 </a:solidFill>
                 <a:latin typeface="JetBrains Mono"/>
                 <a:ea typeface="JetBrains Mono"/>
@@ -5936,7 +5936,7 @@
             <a:r>
               <a:rPr sz="2400">
                 <a:solidFill>
-                  <a:srgbClr val="1750EB"/>
+                  <a:srgbClr val="C45E00"/>
                 </a:solidFill>
                 <a:latin typeface="JetBrains Mono"/>
                 <a:ea typeface="JetBrains Mono"/>
@@ -5977,7 +5977,7 @@
             <a:r>
               <a:rPr sz="2400">
                 <a:solidFill>
-                  <a:srgbClr val="1750EB"/>
+                  <a:srgbClr val="C45E00"/>
                 </a:solidFill>
                 <a:latin typeface="JetBrains Mono"/>
                 <a:ea typeface="JetBrains Mono"/>
@@ -6103,7 +6103,7 @@
             <a:r>
               <a:rPr sz="2400">
                 <a:solidFill>
-                  <a:srgbClr val="1750EB"/>
+                  <a:srgbClr val="C45E00"/>
                 </a:solidFill>
                 <a:latin typeface="JetBrains Mono"/>
                 <a:ea typeface="JetBrains Mono"/>
@@ -6122,7 +6122,7 @@
             <a:r>
               <a:rPr sz="2400">
                 <a:solidFill>
-                  <a:srgbClr val="1750EB"/>
+                  <a:srgbClr val="C45E00"/>
                 </a:solidFill>
                 <a:latin typeface="JetBrains Mono"/>
                 <a:ea typeface="JetBrains Mono"/>
@@ -6166,7 +6166,7 @@
             <a:r>
               <a:rPr sz="2400">
                 <a:solidFill>
-                  <a:srgbClr val="1750EB"/>
+                  <a:srgbClr val="C45E00"/>
                 </a:solidFill>
                 <a:latin typeface="JetBrains Mono"/>
                 <a:ea typeface="JetBrains Mono"/>
@@ -6714,7 +6714,7 @@
             <a:r>
               <a:rPr sz="2400">
                 <a:solidFill>
-                  <a:srgbClr val="1750EB"/>
+                  <a:srgbClr val="C45E00"/>
                 </a:solidFill>
                 <a:latin typeface="JetBrains Mono"/>
                 <a:ea typeface="JetBrains Mono"/>
@@ -6733,7 +6733,7 @@
             <a:r>
               <a:rPr sz="2400">
                 <a:solidFill>
-                  <a:srgbClr val="1750EB"/>
+                  <a:srgbClr val="C45E00"/>
                 </a:solidFill>
                 <a:latin typeface="JetBrains Mono"/>
                 <a:ea typeface="JetBrains Mono"/>
@@ -6755,7 +6755,7 @@
             <a:r>
               <a:rPr sz="2400">
                 <a:solidFill>
-                  <a:srgbClr val="1750EB"/>
+                  <a:srgbClr val="C45E00"/>
                 </a:solidFill>
                 <a:latin typeface="JetBrains Mono"/>
                 <a:ea typeface="JetBrains Mono"/>
@@ -6796,7 +6796,7 @@
             <a:r>
               <a:rPr sz="2400">
                 <a:solidFill>
-                  <a:srgbClr val="1750EB"/>
+                  <a:srgbClr val="C45E00"/>
                 </a:solidFill>
                 <a:latin typeface="JetBrains Mono"/>
                 <a:ea typeface="JetBrains Mono"/>
@@ -6922,7 +6922,7 @@
             <a:r>
               <a:rPr sz="2400">
                 <a:solidFill>
-                  <a:srgbClr val="1750EB"/>
+                  <a:srgbClr val="C45E00"/>
                 </a:solidFill>
                 <a:latin typeface="JetBrains Mono"/>
                 <a:ea typeface="JetBrains Mono"/>
@@ -6941,7 +6941,7 @@
             <a:r>
               <a:rPr sz="2400">
                 <a:solidFill>
-                  <a:srgbClr val="1750EB"/>
+                  <a:srgbClr val="C45E00"/>
                 </a:solidFill>
                 <a:latin typeface="JetBrains Mono"/>
                 <a:ea typeface="JetBrains Mono"/>
@@ -6985,7 +6985,7 @@
             <a:r>
               <a:rPr sz="2400">
                 <a:solidFill>
-                  <a:srgbClr val="1750EB"/>
+                  <a:srgbClr val="C45E00"/>
                 </a:solidFill>
                 <a:latin typeface="JetBrains Mono"/>
                 <a:ea typeface="JetBrains Mono"/>
@@ -7790,7 +7790,7 @@
             <a:r>
               <a:rPr sz="1200">
                 <a:solidFill>
-                  <a:srgbClr val="1750EB"/>
+                  <a:srgbClr val="C45E00"/>
                 </a:solidFill>
                 <a:latin typeface="JetBrains Mono"/>
                 <a:ea typeface="JetBrains Mono"/>
@@ -7811,7 +7811,7 @@
             <a:r>
               <a:rPr sz="1200">
                 <a:solidFill>
-                  <a:srgbClr val="1750EB"/>
+                  <a:srgbClr val="C45E00"/>
                 </a:solidFill>
                 <a:latin typeface="JetBrains Mono"/>
                 <a:ea typeface="JetBrains Mono"/>
@@ -7833,7 +7833,7 @@
             <a:r>
               <a:rPr sz="1200">
                 <a:solidFill>
-                  <a:srgbClr val="1750EB"/>
+                  <a:srgbClr val="C45E00"/>
                 </a:solidFill>
                 <a:latin typeface="JetBrains Mono"/>
                 <a:ea typeface="JetBrains Mono"/>
@@ -7876,7 +7876,7 @@
             <a:r>
               <a:rPr sz="1200">
                 <a:solidFill>
-                  <a:srgbClr val="1750EB"/>
+                  <a:srgbClr val="C45E00"/>
                 </a:solidFill>
                 <a:latin typeface="JetBrains Mono"/>
                 <a:ea typeface="JetBrains Mono"/>
@@ -8006,7 +8006,7 @@
             <a:r>
               <a:rPr sz="1200">
                 <a:solidFill>
-                  <a:srgbClr val="1750EB"/>
+                  <a:srgbClr val="C45E00"/>
                 </a:solidFill>
                 <a:latin typeface="JetBrains Mono"/>
                 <a:ea typeface="JetBrains Mono"/>
@@ -8027,7 +8027,7 @@
             <a:r>
               <a:rPr sz="1200">
                 <a:solidFill>
-                  <a:srgbClr val="1750EB"/>
+                  <a:srgbClr val="C45E00"/>
                 </a:solidFill>
                 <a:latin typeface="JetBrains Mono"/>
                 <a:ea typeface="JetBrains Mono"/>
@@ -8071,7 +8071,7 @@
             <a:r>
               <a:rPr sz="1200">
                 <a:solidFill>
-                  <a:srgbClr val="1750EB"/>
+                  <a:srgbClr val="C45E00"/>
                 </a:solidFill>
                 <a:latin typeface="JetBrains Mono"/>
                 <a:ea typeface="JetBrains Mono"/>
@@ -8866,7 +8866,7 @@
             <a:r>
               <a:rPr sz="1200">
                 <a:solidFill>
-                  <a:srgbClr val="1750EB"/>
+                  <a:srgbClr val="C45E00"/>
                 </a:solidFill>
                 <a:latin typeface="JetBrains Mono"/>
                 <a:ea typeface="JetBrains Mono"/>
@@ -8887,7 +8887,7 @@
             <a:r>
               <a:rPr sz="1200">
                 <a:solidFill>
-                  <a:srgbClr val="1750EB"/>
+                  <a:srgbClr val="C45E00"/>
                 </a:solidFill>
                 <a:latin typeface="JetBrains Mono"/>
                 <a:ea typeface="JetBrains Mono"/>
@@ -8909,7 +8909,7 @@
             <a:r>
               <a:rPr sz="1200">
                 <a:solidFill>
-                  <a:srgbClr val="1750EB"/>
+                  <a:srgbClr val="C45E00"/>
                 </a:solidFill>
                 <a:latin typeface="JetBrains Mono"/>
                 <a:ea typeface="JetBrains Mono"/>
@@ -8952,7 +8952,7 @@
             <a:r>
               <a:rPr sz="1200">
                 <a:solidFill>
-                  <a:srgbClr val="1750EB"/>
+                  <a:srgbClr val="C45E00"/>
                 </a:solidFill>
                 <a:latin typeface="JetBrains Mono"/>
                 <a:ea typeface="JetBrains Mono"/>
@@ -9082,7 +9082,7 @@
             <a:r>
               <a:rPr sz="1200">
                 <a:solidFill>
-                  <a:srgbClr val="1750EB"/>
+                  <a:srgbClr val="C45E00"/>
                 </a:solidFill>
                 <a:latin typeface="JetBrains Mono"/>
                 <a:ea typeface="JetBrains Mono"/>
@@ -9103,7 +9103,7 @@
             <a:r>
               <a:rPr sz="1200">
                 <a:solidFill>
-                  <a:srgbClr val="1750EB"/>
+                  <a:srgbClr val="C45E00"/>
                 </a:solidFill>
                 <a:latin typeface="JetBrains Mono"/>
                 <a:ea typeface="JetBrains Mono"/>
@@ -9147,7 +9147,7 @@
             <a:r>
               <a:rPr sz="1200">
                 <a:solidFill>
-                  <a:srgbClr val="1750EB"/>
+                  <a:srgbClr val="C45E00"/>
                 </a:solidFill>
                 <a:latin typeface="JetBrains Mono"/>
                 <a:ea typeface="JetBrains Mono"/>
@@ -9917,7 +9917,7 @@
             <a:r>
               <a:rPr sz="1200">
                 <a:solidFill>
-                  <a:srgbClr val="1750EB"/>
+                  <a:srgbClr val="C45E00"/>
                 </a:solidFill>
                 <a:latin typeface="JetBrains Mono"/>
                 <a:ea typeface="JetBrains Mono"/>
@@ -9938,7 +9938,7 @@
             <a:r>
               <a:rPr sz="1200">
                 <a:solidFill>
-                  <a:srgbClr val="1750EB"/>
+                  <a:srgbClr val="C45E00"/>
                 </a:solidFill>
                 <a:latin typeface="JetBrains Mono"/>
                 <a:ea typeface="JetBrains Mono"/>
@@ -9960,7 +9960,7 @@
             <a:r>
               <a:rPr sz="1200">
                 <a:solidFill>
-                  <a:srgbClr val="1750EB"/>
+                  <a:srgbClr val="C45E00"/>
                 </a:solidFill>
                 <a:latin typeface="JetBrains Mono"/>
                 <a:ea typeface="JetBrains Mono"/>
@@ -10003,7 +10003,7 @@
             <a:r>
               <a:rPr sz="1200">
                 <a:solidFill>
-                  <a:srgbClr val="1750EB"/>
+                  <a:srgbClr val="C45E00"/>
                 </a:solidFill>
                 <a:latin typeface="JetBrains Mono"/>
                 <a:ea typeface="JetBrains Mono"/>
@@ -10133,7 +10133,7 @@
             <a:r>
               <a:rPr sz="1200">
                 <a:solidFill>
-                  <a:srgbClr val="1750EB"/>
+                  <a:srgbClr val="C45E00"/>
                 </a:solidFill>
                 <a:latin typeface="JetBrains Mono"/>
                 <a:ea typeface="JetBrains Mono"/>
@@ -10154,7 +10154,7 @@
             <a:r>
               <a:rPr sz="1200">
                 <a:solidFill>
-                  <a:srgbClr val="1750EB"/>
+                  <a:srgbClr val="C45E00"/>
                 </a:solidFill>
                 <a:latin typeface="JetBrains Mono"/>
                 <a:ea typeface="JetBrains Mono"/>
@@ -10198,7 +10198,7 @@
             <a:r>
               <a:rPr sz="1200">
                 <a:solidFill>
-                  <a:srgbClr val="1750EB"/>
+                  <a:srgbClr val="C45E00"/>
                 </a:solidFill>
                 <a:latin typeface="JetBrains Mono"/>
                 <a:ea typeface="JetBrains Mono"/>
@@ -10524,7 +10524,7 @@
             <a:r>
               <a:rPr sz="2050" b="0">
                 <a:solidFill>
-                  <a:srgbClr val="1750EB"/>
+                  <a:srgbClr val="C45E00"/>
                 </a:solidFill>
                 <a:latin typeface="JetBrains Mono"/>
                 <a:ea typeface="JetBrains Mono"/>
@@ -11045,7 +11045,7 @@
             <a:r>
               <a:rPr sz="1200">
                 <a:solidFill>
-                  <a:srgbClr val="1750EB"/>
+                  <a:srgbClr val="C45E00"/>
                 </a:solidFill>
                 <a:latin typeface="JetBrains Mono"/>
                 <a:ea typeface="JetBrains Mono"/>
@@ -11066,7 +11066,7 @@
             <a:r>
               <a:rPr sz="1200">
                 <a:solidFill>
-                  <a:srgbClr val="1750EB"/>
+                  <a:srgbClr val="C45E00"/>
                 </a:solidFill>
                 <a:latin typeface="JetBrains Mono"/>
                 <a:ea typeface="JetBrains Mono"/>
@@ -11088,7 +11088,7 @@
             <a:r>
               <a:rPr sz="1200">
                 <a:solidFill>
-                  <a:srgbClr val="1750EB"/>
+                  <a:srgbClr val="C45E00"/>
                 </a:solidFill>
                 <a:latin typeface="JetBrains Mono"/>
                 <a:ea typeface="JetBrains Mono"/>
@@ -11131,7 +11131,7 @@
             <a:r>
               <a:rPr sz="1200">
                 <a:solidFill>
-                  <a:srgbClr val="1750EB"/>
+                  <a:srgbClr val="C45E00"/>
                 </a:solidFill>
                 <a:latin typeface="JetBrains Mono"/>
                 <a:ea typeface="JetBrains Mono"/>
@@ -11261,7 +11261,7 @@
             <a:r>
               <a:rPr sz="1200">
                 <a:solidFill>
-                  <a:srgbClr val="1750EB"/>
+                  <a:srgbClr val="C45E00"/>
                 </a:solidFill>
                 <a:latin typeface="JetBrains Mono"/>
                 <a:ea typeface="JetBrains Mono"/>
@@ -11282,7 +11282,7 @@
             <a:r>
               <a:rPr sz="1200">
                 <a:solidFill>
-                  <a:srgbClr val="1750EB"/>
+                  <a:srgbClr val="C45E00"/>
                 </a:solidFill>
                 <a:latin typeface="JetBrains Mono"/>
                 <a:ea typeface="JetBrains Mono"/>
@@ -11326,7 +11326,7 @@
             <a:r>
               <a:rPr sz="1200">
                 <a:solidFill>
-                  <a:srgbClr val="1750EB"/>
+                  <a:srgbClr val="C45E00"/>
                 </a:solidFill>
                 <a:latin typeface="JetBrains Mono"/>
                 <a:ea typeface="JetBrains Mono"/>
@@ -11650,7 +11650,7 @@
             <a:r>
               <a:rPr sz="1800">
                 <a:solidFill>
-                  <a:srgbClr val="1750EB"/>
+                  <a:srgbClr val="C45E00"/>
                 </a:solidFill>
                 <a:latin typeface="JetBrains Mono"/>
                 <a:ea typeface="JetBrains Mono"/>
@@ -11669,7 +11669,7 @@
             <a:r>
               <a:rPr sz="1800">
                 <a:solidFill>
-                  <a:srgbClr val="1750EB"/>
+                  <a:srgbClr val="C45E00"/>
                 </a:solidFill>
                 <a:latin typeface="JetBrains Mono"/>
                 <a:ea typeface="JetBrains Mono"/>
@@ -11691,7 +11691,7 @@
             <a:r>
               <a:rPr sz="1800">
                 <a:solidFill>
-                  <a:srgbClr val="1750EB"/>
+                  <a:srgbClr val="C45E00"/>
                 </a:solidFill>
                 <a:latin typeface="JetBrains Mono"/>
                 <a:ea typeface="JetBrains Mono"/>
@@ -11732,7 +11732,7 @@
             <a:r>
               <a:rPr sz="1800">
                 <a:solidFill>
-                  <a:srgbClr val="1750EB"/>
+                  <a:srgbClr val="C45E00"/>
                 </a:solidFill>
                 <a:latin typeface="JetBrains Mono"/>
                 <a:ea typeface="JetBrains Mono"/>
@@ -11817,7 +11817,7 @@
             <a:r>
               <a:rPr sz="1800">
                 <a:solidFill>
-                  <a:srgbClr val="1750EB"/>
+                  <a:srgbClr val="C45E00"/>
                 </a:solidFill>
                 <a:latin typeface="JetBrains Mono"/>
                 <a:ea typeface="JetBrains Mono"/>
@@ -11847,7 +11847,7 @@
             <a:r>
               <a:rPr sz="1800">
                 <a:solidFill>
-                  <a:srgbClr val="1750EB"/>
+                  <a:srgbClr val="C45E00"/>
                 </a:solidFill>
                 <a:latin typeface="JetBrains Mono"/>
                 <a:ea typeface="JetBrains Mono"/>
@@ -11891,7 +11891,7 @@
             <a:r>
               <a:rPr sz="1800">
                 <a:solidFill>
-                  <a:srgbClr val="1750EB"/>
+                  <a:srgbClr val="C45E00"/>
                 </a:solidFill>
                 <a:latin typeface="JetBrains Mono"/>
                 <a:ea typeface="JetBrains Mono"/>

--- a/Mapped Curriculum Lessons/Grade 8/Lesson 31 - Searching 2D Lists/Searching 2D Lists - Slides.pptx
+++ b/Mapped Curriculum Lessons/Grade 8/Lesson 31 - Searching 2D Lists/Searching 2D Lists - Slides.pptx
@@ -2,28 +2,28 @@
 <file path=ppt/presentation.xml><?xml version="1.0" encoding="utf-8"?>
 <p:presentation xmlns:p="http://schemas.openxmlformats.org/presentationml/2006/main" embedTrueTypeFonts="1" saveSubsetFonts="0">
   <p:sldMasterIdLst>
-    <p:sldMasterId xmlns:r="http://schemas.openxmlformats.org/officeDocument/2006/relationships" id="2147483648" r:id="R6097dea67da24bff"/>
+    <p:sldMasterId xmlns:r="http://schemas.openxmlformats.org/officeDocument/2006/relationships" id="2147483648" r:id="Rc185fe29c7854278"/>
   </p:sldMasterIdLst>
   <p:notesMasterIdLst>
-    <p:notesMasterId xmlns:r="http://schemas.openxmlformats.org/officeDocument/2006/relationships" r:id="R65515b2d262b4a16"/>
+    <p:notesMasterId xmlns:r="http://schemas.openxmlformats.org/officeDocument/2006/relationships" r:id="R7c53b0c7ac54440e"/>
   </p:notesMasterIdLst>
   <p:sldIdLst>
-    <p:sldId xmlns:r="http://schemas.openxmlformats.org/officeDocument/2006/relationships" id="256" r:id="R7e38c25469724375"/>
-    <p:sldId xmlns:r="http://schemas.openxmlformats.org/officeDocument/2006/relationships" id="257" r:id="R2bd7c76ca4d34fd2"/>
-    <p:sldId xmlns:r="http://schemas.openxmlformats.org/officeDocument/2006/relationships" id="258" r:id="R0e3ac0662f2e47e5"/>
-    <p:sldId xmlns:r="http://schemas.openxmlformats.org/officeDocument/2006/relationships" id="259" r:id="R3f76e786bdd8462d"/>
-    <p:sldId xmlns:r="http://schemas.openxmlformats.org/officeDocument/2006/relationships" id="260" r:id="Rdd4026a2b33e4a57"/>
-    <p:sldId xmlns:r="http://schemas.openxmlformats.org/officeDocument/2006/relationships" id="261" r:id="R39fce1b2dc1f4591"/>
-    <p:sldId xmlns:r="http://schemas.openxmlformats.org/officeDocument/2006/relationships" id="262" r:id="Rb88458a081ec44b6"/>
-    <p:sldId xmlns:r="http://schemas.openxmlformats.org/officeDocument/2006/relationships" id="263" r:id="R9176fd07e6e1468c"/>
-    <p:sldId xmlns:r="http://schemas.openxmlformats.org/officeDocument/2006/relationships" id="264" r:id="R1b6aa762076740aa"/>
+    <p:sldId xmlns:r="http://schemas.openxmlformats.org/officeDocument/2006/relationships" id="256" r:id="R0e1dd393e87543c6"/>
+    <p:sldId xmlns:r="http://schemas.openxmlformats.org/officeDocument/2006/relationships" id="257" r:id="R0ce78a3b73814c9c"/>
+    <p:sldId xmlns:r="http://schemas.openxmlformats.org/officeDocument/2006/relationships" id="258" r:id="R05c9e40c08f04ec3"/>
+    <p:sldId xmlns:r="http://schemas.openxmlformats.org/officeDocument/2006/relationships" id="259" r:id="R87d1b60d62e949bc"/>
+    <p:sldId xmlns:r="http://schemas.openxmlformats.org/officeDocument/2006/relationships" id="260" r:id="R7602bad85c234530"/>
+    <p:sldId xmlns:r="http://schemas.openxmlformats.org/officeDocument/2006/relationships" id="261" r:id="R6e0b875ff1394ac6"/>
+    <p:sldId xmlns:r="http://schemas.openxmlformats.org/officeDocument/2006/relationships" id="262" r:id="R922f08970ddd4244"/>
+    <p:sldId xmlns:r="http://schemas.openxmlformats.org/officeDocument/2006/relationships" id="263" r:id="R9f37c3c657db4d99"/>
+    <p:sldId xmlns:r="http://schemas.openxmlformats.org/officeDocument/2006/relationships" id="264" r:id="Rbf5ca7a546554f76"/>
   </p:sldIdLst>
   <p:sldSz cx="12192000" cy="6858000"/>
   <p:notesSz cx="6858000" cy="9144000"/>
   <p:embeddedFontLst>
     <p:embeddedFont>
       <p:font typeface="JetBrains Mono"/>
-      <p:regular xmlns:r="http://schemas.openxmlformats.org/officeDocument/2006/relationships" r:id="Rd82229c84b4c4916"/>
+      <p:regular xmlns:r="http://schemas.openxmlformats.org/officeDocument/2006/relationships" r:id="R6ee20dd2953146f3"/>
     </p:embeddedFont>
   </p:embeddedFontLst>
 </p:presentation>
@@ -1071,7 +1071,7 @@
           <p:nvPr/>
         </p:nvPicPr>
         <p:blipFill rotWithShape="1">
-          <a:blip xmlns:r="http://schemas.openxmlformats.org/officeDocument/2006/relationships" xmlns:a="http://schemas.openxmlformats.org/drawingml/2006/main" r:embed="Rb479a672f74841cc"/>
+          <a:blip xmlns:r="http://schemas.openxmlformats.org/officeDocument/2006/relationships" xmlns:a="http://schemas.openxmlformats.org/drawingml/2006/main" r:embed="Rc122d08757594bd8"/>
           <a:stretch xmlns:a="http://schemas.openxmlformats.org/drawingml/2006/main"/>
         </p:blipFill>
         <p:spPr>
@@ -1451,7 +1451,7 @@
           <p:nvPr/>
         </p:nvPicPr>
         <p:blipFill rotWithShape="1">
-          <a:blip xmlns:r="http://schemas.openxmlformats.org/officeDocument/2006/relationships" xmlns:a="http://schemas.openxmlformats.org/drawingml/2006/main" r:embed="R17d4d4bacf824a89">
+          <a:blip xmlns:r="http://schemas.openxmlformats.org/officeDocument/2006/relationships" xmlns:a="http://schemas.openxmlformats.org/drawingml/2006/main" r:embed="R64801eeec66042fe">
             <a:alphaModFix amt="28000"/>
           </a:blip>
           <a:stretch xmlns:a="http://schemas.openxmlformats.org/drawingml/2006/main"/>
@@ -1664,7 +1664,7 @@
           <p:nvPr/>
         </p:nvPicPr>
         <p:blipFill rotWithShape="1">
-          <a:blip xmlns:r="http://schemas.openxmlformats.org/officeDocument/2006/relationships" xmlns:a="http://schemas.openxmlformats.org/drawingml/2006/main" r:embed="R54329926c4504d88">
+          <a:blip xmlns:r="http://schemas.openxmlformats.org/officeDocument/2006/relationships" xmlns:a="http://schemas.openxmlformats.org/drawingml/2006/main" r:embed="R4d6b97026997477a">
             <a:alphaModFix amt="28000"/>
           </a:blip>
           <a:stretch xmlns:a="http://schemas.openxmlformats.org/drawingml/2006/main"/>
@@ -1899,7 +1899,7 @@
           <p:nvPr/>
         </p:nvPicPr>
         <p:blipFill rotWithShape="1">
-          <a:blip xmlns:r="http://schemas.openxmlformats.org/officeDocument/2006/relationships" xmlns:a="http://schemas.openxmlformats.org/drawingml/2006/main" r:embed="R96ad2140cd434edd">
+          <a:blip xmlns:r="http://schemas.openxmlformats.org/officeDocument/2006/relationships" xmlns:a="http://schemas.openxmlformats.org/drawingml/2006/main" r:embed="R0d18cd9db4214684">
             <a:alphaModFix amt="28000"/>
           </a:blip>
           <a:stretch xmlns:a="http://schemas.openxmlformats.org/drawingml/2006/main"/>
@@ -2176,7 +2176,7 @@
           <p:nvPr/>
         </p:nvPicPr>
         <p:blipFill rotWithShape="1">
-          <a:blip xmlns:r="http://schemas.openxmlformats.org/officeDocument/2006/relationships" xmlns:a="http://schemas.openxmlformats.org/drawingml/2006/main" r:embed="Rc8bd050c688b403f">
+          <a:blip xmlns:r="http://schemas.openxmlformats.org/officeDocument/2006/relationships" xmlns:a="http://schemas.openxmlformats.org/drawingml/2006/main" r:embed="Rf51efec5a3cf44ce">
             <a:alphaModFix amt="28000"/>
           </a:blip>
           <a:stretch xmlns:a="http://schemas.openxmlformats.org/drawingml/2006/main"/>
@@ -2451,7 +2451,7 @@
           <p:nvPr/>
         </p:nvPicPr>
         <p:blipFill rotWithShape="1">
-          <a:blip xmlns:r="http://schemas.openxmlformats.org/officeDocument/2006/relationships" xmlns:a="http://schemas.openxmlformats.org/drawingml/2006/main" r:embed="R36423a2630f74341">
+          <a:blip xmlns:r="http://schemas.openxmlformats.org/officeDocument/2006/relationships" xmlns:a="http://schemas.openxmlformats.org/drawingml/2006/main" r:embed="R7788a2d56023463d">
             <a:alphaModFix amt="28000"/>
           </a:blip>
           <a:stretch xmlns:a="http://schemas.openxmlformats.org/drawingml/2006/main"/>
@@ -2875,7 +2875,7 @@
           <p:nvPr/>
         </p:nvPicPr>
         <p:blipFill rotWithShape="1">
-          <a:blip xmlns:r="http://schemas.openxmlformats.org/officeDocument/2006/relationships" xmlns:a="http://schemas.openxmlformats.org/drawingml/2006/main" r:embed="R1d9ff3f09a8b4545">
+          <a:blip xmlns:r="http://schemas.openxmlformats.org/officeDocument/2006/relationships" xmlns:a="http://schemas.openxmlformats.org/drawingml/2006/main" r:embed="R644e4964af88439c">
             <a:alphaModFix amt="28000"/>
           </a:blip>
           <a:stretch xmlns:a="http://schemas.openxmlformats.org/drawingml/2006/main"/>
@@ -3016,7 +3016,7 @@
           <p:nvPr/>
         </p:nvPicPr>
         <p:blipFill rotWithShape="1">
-          <a:blip xmlns:r="http://schemas.openxmlformats.org/officeDocument/2006/relationships" xmlns:a="http://schemas.openxmlformats.org/drawingml/2006/main" r:embed="R83ccc1e454a44708">
+          <a:blip xmlns:r="http://schemas.openxmlformats.org/officeDocument/2006/relationships" xmlns:a="http://schemas.openxmlformats.org/drawingml/2006/main" r:embed="Rccc6e26a0e6d4512">
             <a:alphaModFix amt="28000"/>
           </a:blip>
           <a:stretch xmlns:a="http://schemas.openxmlformats.org/drawingml/2006/main"/>
@@ -3130,7 +3130,7 @@
           <p:nvPr/>
         </p:nvPicPr>
         <p:blipFill rotWithShape="1">
-          <a:blip xmlns:r="http://schemas.openxmlformats.org/officeDocument/2006/relationships" xmlns:a="http://schemas.openxmlformats.org/drawingml/2006/main" r:embed="R4af90b1f89b44601">
+          <a:blip xmlns:r="http://schemas.openxmlformats.org/officeDocument/2006/relationships" xmlns:a="http://schemas.openxmlformats.org/drawingml/2006/main" r:embed="Ra60895a104bf41ec">
             <a:alphaModFix amt="28000"/>
           </a:blip>
           <a:stretch xmlns:a="http://schemas.openxmlformats.org/drawingml/2006/main"/>
@@ -3457,7 +3457,7 @@
           <p:nvPr/>
         </p:nvPicPr>
         <p:blipFill rotWithShape="1">
-          <a:blip xmlns:r="http://schemas.openxmlformats.org/officeDocument/2006/relationships" xmlns:a="http://schemas.openxmlformats.org/drawingml/2006/main" r:embed="R254cd248131a4b3e">
+          <a:blip xmlns:r="http://schemas.openxmlformats.org/officeDocument/2006/relationships" xmlns:a="http://schemas.openxmlformats.org/drawingml/2006/main" r:embed="Re39c9c5c9dce431e">
             <a:alphaModFix amt="28000"/>
           </a:blip>
           <a:stretch xmlns:a="http://schemas.openxmlformats.org/drawingml/2006/main"/>
@@ -3745,7 +3745,7 @@
           <p:nvPr/>
         </p:nvPicPr>
         <p:blipFill rotWithShape="1">
-          <a:blip xmlns:r="http://schemas.openxmlformats.org/officeDocument/2006/relationships" xmlns:a="http://schemas.openxmlformats.org/drawingml/2006/main" r:embed="Rebf212062ac145e1">
+          <a:blip xmlns:r="http://schemas.openxmlformats.org/officeDocument/2006/relationships" xmlns:a="http://schemas.openxmlformats.org/drawingml/2006/main" r:embed="Reb3a0a016497406d">
             <a:alphaModFix amt="28000"/>
           </a:blip>
           <a:stretch xmlns:a="http://schemas.openxmlformats.org/drawingml/2006/main"/>
@@ -3982,17 +3982,17 @@
   </p:cSld>
   <p:clrMap bg1="lt1" tx1="dk1" bg2="lt2" tx2="dk2" accent1="accent1" accent2="accent2" accent3="accent3" accent4="accent4" accent5="accent5" accent6="accent6" hlink="hlink" folHlink="folHlink"/>
   <p:sldLayoutIdLst>
-    <p:sldLayoutId xmlns:r="http://schemas.openxmlformats.org/officeDocument/2006/relationships" id="2147483649" r:id="Rf3315277801a4629"/>
-    <p:sldLayoutId xmlns:r="http://schemas.openxmlformats.org/officeDocument/2006/relationships" id="2147483650" r:id="Re76af7a9bd4041a7"/>
-    <p:sldLayoutId xmlns:r="http://schemas.openxmlformats.org/officeDocument/2006/relationships" id="2147483651" r:id="Rbffa681064674003"/>
-    <p:sldLayoutId xmlns:r="http://schemas.openxmlformats.org/officeDocument/2006/relationships" id="2147483652" r:id="R5587f4027f284738"/>
-    <p:sldLayoutId xmlns:r="http://schemas.openxmlformats.org/officeDocument/2006/relationships" id="2147483653" r:id="Re9c32cb84f1a44aa"/>
-    <p:sldLayoutId xmlns:r="http://schemas.openxmlformats.org/officeDocument/2006/relationships" id="2147483654" r:id="Rae84c79eb9524de0"/>
-    <p:sldLayoutId xmlns:r="http://schemas.openxmlformats.org/officeDocument/2006/relationships" id="2147483655" r:id="R2a08b4f458b847db"/>
-    <p:sldLayoutId xmlns:r="http://schemas.openxmlformats.org/officeDocument/2006/relationships" id="2147483656" r:id="R4e13dba1802f43a2"/>
-    <p:sldLayoutId xmlns:r="http://schemas.openxmlformats.org/officeDocument/2006/relationships" id="2147483657" r:id="R2204640e5af242ed"/>
-    <p:sldLayoutId xmlns:r="http://schemas.openxmlformats.org/officeDocument/2006/relationships" id="2147483658" r:id="R12342e2e48da4ab4"/>
-    <p:sldLayoutId xmlns:r="http://schemas.openxmlformats.org/officeDocument/2006/relationships" id="2147483659" r:id="R0ac9a34a2a644247"/>
+    <p:sldLayoutId xmlns:r="http://schemas.openxmlformats.org/officeDocument/2006/relationships" id="2147483649" r:id="R2057e6278e85445b"/>
+    <p:sldLayoutId xmlns:r="http://schemas.openxmlformats.org/officeDocument/2006/relationships" id="2147483650" r:id="R4ad7e5eeb0f04ca4"/>
+    <p:sldLayoutId xmlns:r="http://schemas.openxmlformats.org/officeDocument/2006/relationships" id="2147483651" r:id="Rdd5ea19f33054ec4"/>
+    <p:sldLayoutId xmlns:r="http://schemas.openxmlformats.org/officeDocument/2006/relationships" id="2147483652" r:id="Re794a39302aa4e1c"/>
+    <p:sldLayoutId xmlns:r="http://schemas.openxmlformats.org/officeDocument/2006/relationships" id="2147483653" r:id="R3d16505e4bb14dbb"/>
+    <p:sldLayoutId xmlns:r="http://schemas.openxmlformats.org/officeDocument/2006/relationships" id="2147483654" r:id="R0f948ba6c0164070"/>
+    <p:sldLayoutId xmlns:r="http://schemas.openxmlformats.org/officeDocument/2006/relationships" id="2147483655" r:id="Rf6d4c21c88c64adf"/>
+    <p:sldLayoutId xmlns:r="http://schemas.openxmlformats.org/officeDocument/2006/relationships" id="2147483656" r:id="Ree93b1b7ad784010"/>
+    <p:sldLayoutId xmlns:r="http://schemas.openxmlformats.org/officeDocument/2006/relationships" id="2147483657" r:id="Rf364adc21b8b42c6"/>
+    <p:sldLayoutId xmlns:r="http://schemas.openxmlformats.org/officeDocument/2006/relationships" id="2147483658" r:id="R266642cfab89410c"/>
+    <p:sldLayoutId xmlns:r="http://schemas.openxmlformats.org/officeDocument/2006/relationships" id="2147483659" r:id="Rd4f914c02b82414d"/>
   </p:sldLayoutIdLst>
   <p:hf hdr="0" ftr="0" dt="0"/>
   <p:txStyles>

--- a/Mapped Curriculum Lessons/Grade 8/Lesson 31 - Searching 2D Lists/Searching 2D Lists - Slides.pptx
+++ b/Mapped Curriculum Lessons/Grade 8/Lesson 31 - Searching 2D Lists/Searching 2D Lists - Slides.pptx
@@ -2,28 +2,28 @@
 <file path=ppt/presentation.xml><?xml version="1.0" encoding="utf-8"?>
 <p:presentation xmlns:p="http://schemas.openxmlformats.org/presentationml/2006/main" embedTrueTypeFonts="1" saveSubsetFonts="0">
   <p:sldMasterIdLst>
-    <p:sldMasterId xmlns:r="http://schemas.openxmlformats.org/officeDocument/2006/relationships" id="2147483648" r:id="Rc185fe29c7854278"/>
+    <p:sldMasterId xmlns:r="http://schemas.openxmlformats.org/officeDocument/2006/relationships" id="2147483648" r:id="R2c40a2c63eb446ec"/>
   </p:sldMasterIdLst>
   <p:notesMasterIdLst>
-    <p:notesMasterId xmlns:r="http://schemas.openxmlformats.org/officeDocument/2006/relationships" r:id="R7c53b0c7ac54440e"/>
+    <p:notesMasterId xmlns:r="http://schemas.openxmlformats.org/officeDocument/2006/relationships" r:id="R28a51832f29b4ba9"/>
   </p:notesMasterIdLst>
   <p:sldIdLst>
-    <p:sldId xmlns:r="http://schemas.openxmlformats.org/officeDocument/2006/relationships" id="256" r:id="R0e1dd393e87543c6"/>
-    <p:sldId xmlns:r="http://schemas.openxmlformats.org/officeDocument/2006/relationships" id="257" r:id="R0ce78a3b73814c9c"/>
-    <p:sldId xmlns:r="http://schemas.openxmlformats.org/officeDocument/2006/relationships" id="258" r:id="R05c9e40c08f04ec3"/>
-    <p:sldId xmlns:r="http://schemas.openxmlformats.org/officeDocument/2006/relationships" id="259" r:id="R87d1b60d62e949bc"/>
-    <p:sldId xmlns:r="http://schemas.openxmlformats.org/officeDocument/2006/relationships" id="260" r:id="R7602bad85c234530"/>
-    <p:sldId xmlns:r="http://schemas.openxmlformats.org/officeDocument/2006/relationships" id="261" r:id="R6e0b875ff1394ac6"/>
-    <p:sldId xmlns:r="http://schemas.openxmlformats.org/officeDocument/2006/relationships" id="262" r:id="R922f08970ddd4244"/>
-    <p:sldId xmlns:r="http://schemas.openxmlformats.org/officeDocument/2006/relationships" id="263" r:id="R9f37c3c657db4d99"/>
-    <p:sldId xmlns:r="http://schemas.openxmlformats.org/officeDocument/2006/relationships" id="264" r:id="Rbf5ca7a546554f76"/>
+    <p:sldId xmlns:r="http://schemas.openxmlformats.org/officeDocument/2006/relationships" id="256" r:id="R0fb91b26520d4c01"/>
+    <p:sldId xmlns:r="http://schemas.openxmlformats.org/officeDocument/2006/relationships" id="257" r:id="R4b80958c1ad84f8a"/>
+    <p:sldId xmlns:r="http://schemas.openxmlformats.org/officeDocument/2006/relationships" id="258" r:id="Raf5f23a769e143a1"/>
+    <p:sldId xmlns:r="http://schemas.openxmlformats.org/officeDocument/2006/relationships" id="259" r:id="R763efddf8a21454d"/>
+    <p:sldId xmlns:r="http://schemas.openxmlformats.org/officeDocument/2006/relationships" id="260" r:id="R261af403f53d4f53"/>
+    <p:sldId xmlns:r="http://schemas.openxmlformats.org/officeDocument/2006/relationships" id="261" r:id="R9af36347ea3d4114"/>
+    <p:sldId xmlns:r="http://schemas.openxmlformats.org/officeDocument/2006/relationships" id="262" r:id="R1cbbbca3ce6a47ef"/>
+    <p:sldId xmlns:r="http://schemas.openxmlformats.org/officeDocument/2006/relationships" id="263" r:id="Ra6d3d70a29a346a0"/>
+    <p:sldId xmlns:r="http://schemas.openxmlformats.org/officeDocument/2006/relationships" id="264" r:id="R88c84397496449d7"/>
   </p:sldIdLst>
   <p:sldSz cx="12192000" cy="6858000"/>
   <p:notesSz cx="6858000" cy="9144000"/>
   <p:embeddedFontLst>
     <p:embeddedFont>
       <p:font typeface="JetBrains Mono"/>
-      <p:regular xmlns:r="http://schemas.openxmlformats.org/officeDocument/2006/relationships" r:id="R6ee20dd2953146f3"/>
+      <p:regular xmlns:r="http://schemas.openxmlformats.org/officeDocument/2006/relationships" r:id="Rf313c024249748ff"/>
     </p:embeddedFont>
   </p:embeddedFontLst>
 </p:presentation>
@@ -1071,7 +1071,7 @@
           <p:nvPr/>
         </p:nvPicPr>
         <p:blipFill rotWithShape="1">
-          <a:blip xmlns:r="http://schemas.openxmlformats.org/officeDocument/2006/relationships" xmlns:a="http://schemas.openxmlformats.org/drawingml/2006/main" r:embed="Rc122d08757594bd8"/>
+          <a:blip xmlns:r="http://schemas.openxmlformats.org/officeDocument/2006/relationships" xmlns:a="http://schemas.openxmlformats.org/drawingml/2006/main" r:embed="R6ffa54428d104016"/>
           <a:stretch xmlns:a="http://schemas.openxmlformats.org/drawingml/2006/main"/>
         </p:blipFill>
         <p:spPr>
@@ -1451,7 +1451,7 @@
           <p:nvPr/>
         </p:nvPicPr>
         <p:blipFill rotWithShape="1">
-          <a:blip xmlns:r="http://schemas.openxmlformats.org/officeDocument/2006/relationships" xmlns:a="http://schemas.openxmlformats.org/drawingml/2006/main" r:embed="R64801eeec66042fe">
+          <a:blip xmlns:r="http://schemas.openxmlformats.org/officeDocument/2006/relationships" xmlns:a="http://schemas.openxmlformats.org/drawingml/2006/main" r:embed="R2fd3ed3f90e74904">
             <a:alphaModFix amt="28000"/>
           </a:blip>
           <a:stretch xmlns:a="http://schemas.openxmlformats.org/drawingml/2006/main"/>
@@ -1664,7 +1664,7 @@
           <p:nvPr/>
         </p:nvPicPr>
         <p:blipFill rotWithShape="1">
-          <a:blip xmlns:r="http://schemas.openxmlformats.org/officeDocument/2006/relationships" xmlns:a="http://schemas.openxmlformats.org/drawingml/2006/main" r:embed="R4d6b97026997477a">
+          <a:blip xmlns:r="http://schemas.openxmlformats.org/officeDocument/2006/relationships" xmlns:a="http://schemas.openxmlformats.org/drawingml/2006/main" r:embed="Rb981567d4f034e82">
             <a:alphaModFix amt="28000"/>
           </a:blip>
           <a:stretch xmlns:a="http://schemas.openxmlformats.org/drawingml/2006/main"/>
@@ -1899,7 +1899,7 @@
           <p:nvPr/>
         </p:nvPicPr>
         <p:blipFill rotWithShape="1">
-          <a:blip xmlns:r="http://schemas.openxmlformats.org/officeDocument/2006/relationships" xmlns:a="http://schemas.openxmlformats.org/drawingml/2006/main" r:embed="R0d18cd9db4214684">
+          <a:blip xmlns:r="http://schemas.openxmlformats.org/officeDocument/2006/relationships" xmlns:a="http://schemas.openxmlformats.org/drawingml/2006/main" r:embed="Rce2bcc2972ca40d5">
             <a:alphaModFix amt="28000"/>
           </a:blip>
           <a:stretch xmlns:a="http://schemas.openxmlformats.org/drawingml/2006/main"/>
@@ -2176,7 +2176,7 @@
           <p:nvPr/>
         </p:nvPicPr>
         <p:blipFill rotWithShape="1">
-          <a:blip xmlns:r="http://schemas.openxmlformats.org/officeDocument/2006/relationships" xmlns:a="http://schemas.openxmlformats.org/drawingml/2006/main" r:embed="Rf51efec5a3cf44ce">
+          <a:blip xmlns:r="http://schemas.openxmlformats.org/officeDocument/2006/relationships" xmlns:a="http://schemas.openxmlformats.org/drawingml/2006/main" r:embed="R8bc63916a45c455a">
             <a:alphaModFix amt="28000"/>
           </a:blip>
           <a:stretch xmlns:a="http://schemas.openxmlformats.org/drawingml/2006/main"/>
@@ -2451,7 +2451,7 @@
           <p:nvPr/>
         </p:nvPicPr>
         <p:blipFill rotWithShape="1">
-          <a:blip xmlns:r="http://schemas.openxmlformats.org/officeDocument/2006/relationships" xmlns:a="http://schemas.openxmlformats.org/drawingml/2006/main" r:embed="R7788a2d56023463d">
+          <a:blip xmlns:r="http://schemas.openxmlformats.org/officeDocument/2006/relationships" xmlns:a="http://schemas.openxmlformats.org/drawingml/2006/main" r:embed="R572cafc142684717">
             <a:alphaModFix amt="28000"/>
           </a:blip>
           <a:stretch xmlns:a="http://schemas.openxmlformats.org/drawingml/2006/main"/>
@@ -2875,7 +2875,7 @@
           <p:nvPr/>
         </p:nvPicPr>
         <p:blipFill rotWithShape="1">
-          <a:blip xmlns:r="http://schemas.openxmlformats.org/officeDocument/2006/relationships" xmlns:a="http://schemas.openxmlformats.org/drawingml/2006/main" r:embed="R644e4964af88439c">
+          <a:blip xmlns:r="http://schemas.openxmlformats.org/officeDocument/2006/relationships" xmlns:a="http://schemas.openxmlformats.org/drawingml/2006/main" r:embed="Rca7422b0b0bc41b2">
             <a:alphaModFix amt="28000"/>
           </a:blip>
           <a:stretch xmlns:a="http://schemas.openxmlformats.org/drawingml/2006/main"/>
@@ -3016,7 +3016,7 @@
           <p:nvPr/>
         </p:nvPicPr>
         <p:blipFill rotWithShape="1">
-          <a:blip xmlns:r="http://schemas.openxmlformats.org/officeDocument/2006/relationships" xmlns:a="http://schemas.openxmlformats.org/drawingml/2006/main" r:embed="Rccc6e26a0e6d4512">
+          <a:blip xmlns:r="http://schemas.openxmlformats.org/officeDocument/2006/relationships" xmlns:a="http://schemas.openxmlformats.org/drawingml/2006/main" r:embed="Rb52e1b2dd3514640">
             <a:alphaModFix amt="28000"/>
           </a:blip>
           <a:stretch xmlns:a="http://schemas.openxmlformats.org/drawingml/2006/main"/>
@@ -3130,7 +3130,7 @@
           <p:nvPr/>
         </p:nvPicPr>
         <p:blipFill rotWithShape="1">
-          <a:blip xmlns:r="http://schemas.openxmlformats.org/officeDocument/2006/relationships" xmlns:a="http://schemas.openxmlformats.org/drawingml/2006/main" r:embed="Ra60895a104bf41ec">
+          <a:blip xmlns:r="http://schemas.openxmlformats.org/officeDocument/2006/relationships" xmlns:a="http://schemas.openxmlformats.org/drawingml/2006/main" r:embed="R71e404f2f1f74ced">
             <a:alphaModFix amt="28000"/>
           </a:blip>
           <a:stretch xmlns:a="http://schemas.openxmlformats.org/drawingml/2006/main"/>
@@ -3457,7 +3457,7 @@
           <p:nvPr/>
         </p:nvPicPr>
         <p:blipFill rotWithShape="1">
-          <a:blip xmlns:r="http://schemas.openxmlformats.org/officeDocument/2006/relationships" xmlns:a="http://schemas.openxmlformats.org/drawingml/2006/main" r:embed="Re39c9c5c9dce431e">
+          <a:blip xmlns:r="http://schemas.openxmlformats.org/officeDocument/2006/relationships" xmlns:a="http://schemas.openxmlformats.org/drawingml/2006/main" r:embed="R702d46296df94e71">
             <a:alphaModFix amt="28000"/>
           </a:blip>
           <a:stretch xmlns:a="http://schemas.openxmlformats.org/drawingml/2006/main"/>
@@ -3745,7 +3745,7 @@
           <p:nvPr/>
         </p:nvPicPr>
         <p:blipFill rotWithShape="1">
-          <a:blip xmlns:r="http://schemas.openxmlformats.org/officeDocument/2006/relationships" xmlns:a="http://schemas.openxmlformats.org/drawingml/2006/main" r:embed="Reb3a0a016497406d">
+          <a:blip xmlns:r="http://schemas.openxmlformats.org/officeDocument/2006/relationships" xmlns:a="http://schemas.openxmlformats.org/drawingml/2006/main" r:embed="Rdd481a5307954f4a">
             <a:alphaModFix amt="28000"/>
           </a:blip>
           <a:stretch xmlns:a="http://schemas.openxmlformats.org/drawingml/2006/main"/>
@@ -3982,17 +3982,17 @@
   </p:cSld>
   <p:clrMap bg1="lt1" tx1="dk1" bg2="lt2" tx2="dk2" accent1="accent1" accent2="accent2" accent3="accent3" accent4="accent4" accent5="accent5" accent6="accent6" hlink="hlink" folHlink="folHlink"/>
   <p:sldLayoutIdLst>
-    <p:sldLayoutId xmlns:r="http://schemas.openxmlformats.org/officeDocument/2006/relationships" id="2147483649" r:id="R2057e6278e85445b"/>
-    <p:sldLayoutId xmlns:r="http://schemas.openxmlformats.org/officeDocument/2006/relationships" id="2147483650" r:id="R4ad7e5eeb0f04ca4"/>
-    <p:sldLayoutId xmlns:r="http://schemas.openxmlformats.org/officeDocument/2006/relationships" id="2147483651" r:id="Rdd5ea19f33054ec4"/>
-    <p:sldLayoutId xmlns:r="http://schemas.openxmlformats.org/officeDocument/2006/relationships" id="2147483652" r:id="Re794a39302aa4e1c"/>
-    <p:sldLayoutId xmlns:r="http://schemas.openxmlformats.org/officeDocument/2006/relationships" id="2147483653" r:id="R3d16505e4bb14dbb"/>
-    <p:sldLayoutId xmlns:r="http://schemas.openxmlformats.org/officeDocument/2006/relationships" id="2147483654" r:id="R0f948ba6c0164070"/>
-    <p:sldLayoutId xmlns:r="http://schemas.openxmlformats.org/officeDocument/2006/relationships" id="2147483655" r:id="Rf6d4c21c88c64adf"/>
-    <p:sldLayoutId xmlns:r="http://schemas.openxmlformats.org/officeDocument/2006/relationships" id="2147483656" r:id="Ree93b1b7ad784010"/>
-    <p:sldLayoutId xmlns:r="http://schemas.openxmlformats.org/officeDocument/2006/relationships" id="2147483657" r:id="Rf364adc21b8b42c6"/>
-    <p:sldLayoutId xmlns:r="http://schemas.openxmlformats.org/officeDocument/2006/relationships" id="2147483658" r:id="R266642cfab89410c"/>
-    <p:sldLayoutId xmlns:r="http://schemas.openxmlformats.org/officeDocument/2006/relationships" id="2147483659" r:id="Rd4f914c02b82414d"/>
+    <p:sldLayoutId xmlns:r="http://schemas.openxmlformats.org/officeDocument/2006/relationships" id="2147483649" r:id="R8420ee3508eb43f7"/>
+    <p:sldLayoutId xmlns:r="http://schemas.openxmlformats.org/officeDocument/2006/relationships" id="2147483650" r:id="Racc2ecc2d178443e"/>
+    <p:sldLayoutId xmlns:r="http://schemas.openxmlformats.org/officeDocument/2006/relationships" id="2147483651" r:id="R019614eeb49848af"/>
+    <p:sldLayoutId xmlns:r="http://schemas.openxmlformats.org/officeDocument/2006/relationships" id="2147483652" r:id="Rccdd992f831348b7"/>
+    <p:sldLayoutId xmlns:r="http://schemas.openxmlformats.org/officeDocument/2006/relationships" id="2147483653" r:id="R8970e979667e448a"/>
+    <p:sldLayoutId xmlns:r="http://schemas.openxmlformats.org/officeDocument/2006/relationships" id="2147483654" r:id="R309b342da5cf44c3"/>
+    <p:sldLayoutId xmlns:r="http://schemas.openxmlformats.org/officeDocument/2006/relationships" id="2147483655" r:id="R5bb801b0ca9743ff"/>
+    <p:sldLayoutId xmlns:r="http://schemas.openxmlformats.org/officeDocument/2006/relationships" id="2147483656" r:id="Rb9a5848c85b5417f"/>
+    <p:sldLayoutId xmlns:r="http://schemas.openxmlformats.org/officeDocument/2006/relationships" id="2147483657" r:id="R9644459e4d0b4041"/>
+    <p:sldLayoutId xmlns:r="http://schemas.openxmlformats.org/officeDocument/2006/relationships" id="2147483658" r:id="Rc755d97fa900451a"/>
+    <p:sldLayoutId xmlns:r="http://schemas.openxmlformats.org/officeDocument/2006/relationships" id="2147483659" r:id="Rae630eef6b0d4d78"/>
   </p:sldLayoutIdLst>
   <p:hf hdr="0" ftr="0" dt="0"/>
   <p:txStyles>
@@ -5147,24 +5147,13 @@
             <a:r>
               <a:rPr sz="2400">
                 <a:solidFill>
-                  <a:srgbClr val="080808"/>
-                </a:solidFill>
-                <a:latin typeface="JetBrains Mono"/>
-                <a:ea typeface="JetBrains Mono"/>
-                <a:cs typeface="JetBrains Mono"/>
-              </a:rPr>
-              <a:t>    </a:t>
-            </a:r>
-            <a:r>
-              <a:rPr sz="2400">
-                <a:solidFill>
                   <a:srgbClr val="C45E00"/>
                 </a:solidFill>
                 <a:latin typeface="JetBrains Mono"/>
                 <a:ea typeface="JetBrains Mono"/>
                 <a:cs typeface="JetBrains Mono"/>
               </a:rPr>
-              <a:t>if</a:t>
+              <a:t>    if</a:t>
             </a:r>
             <a:r>
               <a:rPr sz="2400">
@@ -5210,24 +5199,13 @@
             <a:r>
               <a:rPr sz="2400">
                 <a:solidFill>
-                  <a:srgbClr val="080808"/>
-                </a:solidFill>
-                <a:latin typeface="JetBrains Mono"/>
-                <a:ea typeface="JetBrains Mono"/>
-                <a:cs typeface="JetBrains Mono"/>
-              </a:rPr>
-              <a:t>        </a:t>
-            </a:r>
-            <a:r>
-              <a:rPr sz="2400">
-                <a:solidFill>
                   <a:srgbClr val="1750EB"/>
                 </a:solidFill>
                 <a:latin typeface="JetBrains Mono"/>
                 <a:ea typeface="JetBrains Mono"/>
                 <a:cs typeface="JetBrains Mono"/>
               </a:rPr>
-              <a:t>print</a:t>
+              <a:t>        print</a:t>
             </a:r>
             <a:r>
               <a:rPr sz="2400">
@@ -5336,24 +5314,13 @@
             <a:r>
               <a:rPr sz="2400">
                 <a:solidFill>
-                  <a:srgbClr val="080808"/>
-                </a:solidFill>
-                <a:latin typeface="JetBrains Mono"/>
-                <a:ea typeface="JetBrains Mono"/>
-                <a:cs typeface="JetBrains Mono"/>
-              </a:rPr>
-              <a:t> </a:t>
-            </a:r>
-            <a:r>
-              <a:rPr sz="2400">
-                <a:solidFill>
                   <a:srgbClr val="C45E00"/>
                 </a:solidFill>
                 <a:latin typeface="JetBrains Mono"/>
                 <a:ea typeface="JetBrains Mono"/>
                 <a:cs typeface="JetBrains Mono"/>
               </a:rPr>
-              <a:t>False</a:t>
+              <a:t> False</a:t>
             </a:r>
             <a:r>
               <a:rPr sz="2400">
@@ -5377,24 +5344,13 @@
             <a:r>
               <a:rPr sz="2400">
                 <a:solidFill>
-                  <a:srgbClr val="080808"/>
-                </a:solidFill>
-                <a:latin typeface="JetBrains Mono"/>
-                <a:ea typeface="JetBrains Mono"/>
-                <a:cs typeface="JetBrains Mono"/>
-              </a:rPr>
-              <a:t>    </a:t>
-            </a:r>
-            <a:r>
-              <a:rPr sz="2400">
-                <a:solidFill>
                   <a:srgbClr val="1750EB"/>
                 </a:solidFill>
                 <a:latin typeface="JetBrains Mono"/>
                 <a:ea typeface="JetBrains Mono"/>
                 <a:cs typeface="JetBrains Mono"/>
               </a:rPr>
-              <a:t>print</a:t>
+              <a:t>    print</a:t>
             </a:r>
             <a:r>
               <a:rPr sz="2400">
@@ -5966,24 +5922,13 @@
             <a:r>
               <a:rPr sz="2400">
                 <a:solidFill>
-                  <a:srgbClr val="080808"/>
-                </a:solidFill>
-                <a:latin typeface="JetBrains Mono"/>
-                <a:ea typeface="JetBrains Mono"/>
-                <a:cs typeface="JetBrains Mono"/>
-              </a:rPr>
-              <a:t>    </a:t>
-            </a:r>
-            <a:r>
-              <a:rPr sz="2400">
-                <a:solidFill>
                   <a:srgbClr val="C45E00"/>
                 </a:solidFill>
                 <a:latin typeface="JetBrains Mono"/>
                 <a:ea typeface="JetBrains Mono"/>
                 <a:cs typeface="JetBrains Mono"/>
               </a:rPr>
-              <a:t>if</a:t>
+              <a:t>    if</a:t>
             </a:r>
             <a:r>
               <a:rPr sz="2400">
@@ -6029,24 +5974,13 @@
             <a:r>
               <a:rPr sz="2400">
                 <a:solidFill>
-                  <a:srgbClr val="080808"/>
-                </a:solidFill>
-                <a:latin typeface="JetBrains Mono"/>
-                <a:ea typeface="JetBrains Mono"/>
-                <a:cs typeface="JetBrains Mono"/>
-              </a:rPr>
-              <a:t>        </a:t>
-            </a:r>
-            <a:r>
-              <a:rPr sz="2400">
-                <a:solidFill>
                   <a:srgbClr val="1750EB"/>
                 </a:solidFill>
                 <a:latin typeface="JetBrains Mono"/>
                 <a:ea typeface="JetBrains Mono"/>
                 <a:cs typeface="JetBrains Mono"/>
               </a:rPr>
-              <a:t>print</a:t>
+              <a:t>        print</a:t>
             </a:r>
             <a:r>
               <a:rPr sz="2400">
@@ -6155,24 +6089,13 @@
             <a:r>
               <a:rPr sz="2400">
                 <a:solidFill>
-                  <a:srgbClr val="080808"/>
-                </a:solidFill>
-                <a:latin typeface="JetBrains Mono"/>
-                <a:ea typeface="JetBrains Mono"/>
-                <a:cs typeface="JetBrains Mono"/>
-              </a:rPr>
-              <a:t> </a:t>
-            </a:r>
-            <a:r>
-              <a:rPr sz="2400">
-                <a:solidFill>
                   <a:srgbClr val="C45E00"/>
                 </a:solidFill>
                 <a:latin typeface="JetBrains Mono"/>
                 <a:ea typeface="JetBrains Mono"/>
                 <a:cs typeface="JetBrains Mono"/>
               </a:rPr>
-              <a:t>False</a:t>
+              <a:t> False</a:t>
             </a:r>
             <a:r>
               <a:rPr sz="2400">
@@ -6196,24 +6119,13 @@
             <a:r>
               <a:rPr sz="2400">
                 <a:solidFill>
-                  <a:srgbClr val="080808"/>
-                </a:solidFill>
-                <a:latin typeface="JetBrains Mono"/>
-                <a:ea typeface="JetBrains Mono"/>
-                <a:cs typeface="JetBrains Mono"/>
-              </a:rPr>
-              <a:t>    </a:t>
-            </a:r>
-            <a:r>
-              <a:rPr sz="2400">
-                <a:solidFill>
                   <a:srgbClr val="1750EB"/>
                 </a:solidFill>
                 <a:latin typeface="JetBrains Mono"/>
                 <a:ea typeface="JetBrains Mono"/>
                 <a:cs typeface="JetBrains Mono"/>
               </a:rPr>
-              <a:t>print</a:t>
+              <a:t>    print</a:t>
             </a:r>
             <a:r>
               <a:rPr sz="2400">
@@ -6785,24 +6697,13 @@
             <a:r>
               <a:rPr sz="2400">
                 <a:solidFill>
-                  <a:srgbClr val="080808"/>
-                </a:solidFill>
-                <a:latin typeface="JetBrains Mono"/>
-                <a:ea typeface="JetBrains Mono"/>
-                <a:cs typeface="JetBrains Mono"/>
-              </a:rPr>
-              <a:t>    </a:t>
-            </a:r>
-            <a:r>
-              <a:rPr sz="2400">
-                <a:solidFill>
                   <a:srgbClr val="C45E00"/>
                 </a:solidFill>
                 <a:latin typeface="JetBrains Mono"/>
                 <a:ea typeface="JetBrains Mono"/>
                 <a:cs typeface="JetBrains Mono"/>
               </a:rPr>
-              <a:t>if</a:t>
+              <a:t>    if</a:t>
             </a:r>
             <a:r>
               <a:rPr sz="2400">
@@ -6848,24 +6749,13 @@
             <a:r>
               <a:rPr sz="2400">
                 <a:solidFill>
-                  <a:srgbClr val="080808"/>
-                </a:solidFill>
-                <a:latin typeface="JetBrains Mono"/>
-                <a:ea typeface="JetBrains Mono"/>
-                <a:cs typeface="JetBrains Mono"/>
-              </a:rPr>
-              <a:t>        </a:t>
-            </a:r>
-            <a:r>
-              <a:rPr sz="2400">
-                <a:solidFill>
                   <a:srgbClr val="1750EB"/>
                 </a:solidFill>
                 <a:latin typeface="JetBrains Mono"/>
                 <a:ea typeface="JetBrains Mono"/>
                 <a:cs typeface="JetBrains Mono"/>
               </a:rPr>
-              <a:t>print</a:t>
+              <a:t>        print</a:t>
             </a:r>
             <a:r>
               <a:rPr sz="2400">
@@ -6974,24 +6864,13 @@
             <a:r>
               <a:rPr sz="2400">
                 <a:solidFill>
-                  <a:srgbClr val="080808"/>
-                </a:solidFill>
-                <a:latin typeface="JetBrains Mono"/>
-                <a:ea typeface="JetBrains Mono"/>
-                <a:cs typeface="JetBrains Mono"/>
-              </a:rPr>
-              <a:t> </a:t>
-            </a:r>
-            <a:r>
-              <a:rPr sz="2400">
-                <a:solidFill>
                   <a:srgbClr val="C45E00"/>
                 </a:solidFill>
                 <a:latin typeface="JetBrains Mono"/>
                 <a:ea typeface="JetBrains Mono"/>
                 <a:cs typeface="JetBrains Mono"/>
               </a:rPr>
-              <a:t>False</a:t>
+              <a:t> False</a:t>
             </a:r>
             <a:r>
               <a:rPr sz="2400">
@@ -7015,24 +6894,13 @@
             <a:r>
               <a:rPr sz="2400">
                 <a:solidFill>
-                  <a:srgbClr val="080808"/>
-                </a:solidFill>
-                <a:latin typeface="JetBrains Mono"/>
-                <a:ea typeface="JetBrains Mono"/>
-                <a:cs typeface="JetBrains Mono"/>
-              </a:rPr>
-              <a:t>    </a:t>
-            </a:r>
-            <a:r>
-              <a:rPr sz="2400">
-                <a:solidFill>
                   <a:srgbClr val="1750EB"/>
                 </a:solidFill>
                 <a:latin typeface="JetBrains Mono"/>
                 <a:ea typeface="JetBrains Mono"/>
                 <a:cs typeface="JetBrains Mono"/>
               </a:rPr>
-              <a:t>print</a:t>
+              <a:t>    print</a:t>
             </a:r>
             <a:r>
               <a:rPr sz="2400">
@@ -7865,24 +7733,13 @@
             <a:r>
               <a:rPr sz="1200">
                 <a:solidFill>
-                  <a:srgbClr val="080808"/>
-                </a:solidFill>
-                <a:latin typeface="JetBrains Mono"/>
-                <a:ea typeface="JetBrains Mono"/>
-                <a:cs typeface="JetBrains Mono"/>
-              </a:rPr>
-              <a:t>    </a:t>
-            </a:r>
-            <a:r>
-              <a:rPr sz="1200">
-                <a:solidFill>
                   <a:srgbClr val="C45E00"/>
                 </a:solidFill>
                 <a:latin typeface="JetBrains Mono"/>
                 <a:ea typeface="JetBrains Mono"/>
                 <a:cs typeface="JetBrains Mono"/>
               </a:rPr>
-              <a:t>if</a:t>
+              <a:t>    if</a:t>
             </a:r>
             <a:r>
               <a:rPr sz="1200">
@@ -7930,24 +7787,13 @@
             <a:r>
               <a:rPr sz="1200">
                 <a:solidFill>
-                  <a:srgbClr val="080808"/>
-                </a:solidFill>
-                <a:latin typeface="JetBrains Mono"/>
-                <a:ea typeface="JetBrains Mono"/>
-                <a:cs typeface="JetBrains Mono"/>
-              </a:rPr>
-              <a:t>        </a:t>
-            </a:r>
-            <a:r>
-              <a:rPr sz="1200">
-                <a:solidFill>
                   <a:srgbClr val="1750EB"/>
                 </a:solidFill>
                 <a:latin typeface="JetBrains Mono"/>
                 <a:ea typeface="JetBrains Mono"/>
                 <a:cs typeface="JetBrains Mono"/>
               </a:rPr>
-              <a:t>print</a:t>
+              <a:t>        print</a:t>
             </a:r>
             <a:r>
               <a:rPr sz="1200">
@@ -8060,24 +7906,13 @@
             <a:r>
               <a:rPr sz="1200">
                 <a:solidFill>
-                  <a:srgbClr val="080808"/>
-                </a:solidFill>
-                <a:latin typeface="JetBrains Mono"/>
-                <a:ea typeface="JetBrains Mono"/>
-                <a:cs typeface="JetBrains Mono"/>
-              </a:rPr>
-              <a:t> </a:t>
-            </a:r>
-            <a:r>
-              <a:rPr sz="1200">
-                <a:solidFill>
                   <a:srgbClr val="C45E00"/>
                 </a:solidFill>
                 <a:latin typeface="JetBrains Mono"/>
                 <a:ea typeface="JetBrains Mono"/>
                 <a:cs typeface="JetBrains Mono"/>
               </a:rPr>
-              <a:t>False</a:t>
+              <a:t> False</a:t>
             </a:r>
             <a:r>
               <a:rPr sz="1200">
@@ -8103,24 +7938,13 @@
             <a:r>
               <a:rPr sz="1200">
                 <a:solidFill>
-                  <a:srgbClr val="080808"/>
-                </a:solidFill>
-                <a:latin typeface="JetBrains Mono"/>
-                <a:ea typeface="JetBrains Mono"/>
-                <a:cs typeface="JetBrains Mono"/>
-              </a:rPr>
-              <a:t>    </a:t>
-            </a:r>
-            <a:r>
-              <a:rPr sz="1200">
-                <a:solidFill>
                   <a:srgbClr val="1750EB"/>
                 </a:solidFill>
                 <a:latin typeface="JetBrains Mono"/>
                 <a:ea typeface="JetBrains Mono"/>
                 <a:cs typeface="JetBrains Mono"/>
               </a:rPr>
-              <a:t>print</a:t>
+              <a:t>    print</a:t>
             </a:r>
             <a:r>
               <a:rPr sz="1200">
@@ -8941,24 +8765,13 @@
             <a:r>
               <a:rPr sz="1200">
                 <a:solidFill>
-                  <a:srgbClr val="080808"/>
-                </a:solidFill>
-                <a:latin typeface="JetBrains Mono"/>
-                <a:ea typeface="JetBrains Mono"/>
-                <a:cs typeface="JetBrains Mono"/>
-              </a:rPr>
-              <a:t>    </a:t>
-            </a:r>
-            <a:r>
-              <a:rPr sz="1200">
-                <a:solidFill>
                   <a:srgbClr val="C45E00"/>
                 </a:solidFill>
                 <a:latin typeface="JetBrains Mono"/>
                 <a:ea typeface="JetBrains Mono"/>
                 <a:cs typeface="JetBrains Mono"/>
               </a:rPr>
-              <a:t>if</a:t>
+              <a:t>    if</a:t>
             </a:r>
             <a:r>
               <a:rPr sz="1200">
@@ -9006,24 +8819,13 @@
             <a:r>
               <a:rPr sz="1200">
                 <a:solidFill>
-                  <a:srgbClr val="080808"/>
-                </a:solidFill>
-                <a:latin typeface="JetBrains Mono"/>
-                <a:ea typeface="JetBrains Mono"/>
-                <a:cs typeface="JetBrains Mono"/>
-              </a:rPr>
-              <a:t>        </a:t>
-            </a:r>
-            <a:r>
-              <a:rPr sz="1200">
-                <a:solidFill>
                   <a:srgbClr val="1750EB"/>
                 </a:solidFill>
                 <a:latin typeface="JetBrains Mono"/>
                 <a:ea typeface="JetBrains Mono"/>
                 <a:cs typeface="JetBrains Mono"/>
               </a:rPr>
-              <a:t>print</a:t>
+              <a:t>        print</a:t>
             </a:r>
             <a:r>
               <a:rPr sz="1200">
@@ -9136,24 +8938,13 @@
             <a:r>
               <a:rPr sz="1200">
                 <a:solidFill>
-                  <a:srgbClr val="080808"/>
-                </a:solidFill>
-                <a:latin typeface="JetBrains Mono"/>
-                <a:ea typeface="JetBrains Mono"/>
-                <a:cs typeface="JetBrains Mono"/>
-              </a:rPr>
-              <a:t> </a:t>
-            </a:r>
-            <a:r>
-              <a:rPr sz="1200">
-                <a:solidFill>
                   <a:srgbClr val="C45E00"/>
                 </a:solidFill>
                 <a:latin typeface="JetBrains Mono"/>
                 <a:ea typeface="JetBrains Mono"/>
                 <a:cs typeface="JetBrains Mono"/>
               </a:rPr>
-              <a:t>False</a:t>
+              <a:t> False</a:t>
             </a:r>
             <a:r>
               <a:rPr sz="1200">
@@ -9179,24 +8970,13 @@
             <a:r>
               <a:rPr sz="1200">
                 <a:solidFill>
-                  <a:srgbClr val="080808"/>
-                </a:solidFill>
-                <a:latin typeface="JetBrains Mono"/>
-                <a:ea typeface="JetBrains Mono"/>
-                <a:cs typeface="JetBrains Mono"/>
-              </a:rPr>
-              <a:t>    </a:t>
-            </a:r>
-            <a:r>
-              <a:rPr sz="1200">
-                <a:solidFill>
                   <a:srgbClr val="1750EB"/>
                 </a:solidFill>
                 <a:latin typeface="JetBrains Mono"/>
                 <a:ea typeface="JetBrains Mono"/>
                 <a:cs typeface="JetBrains Mono"/>
               </a:rPr>
-              <a:t>print</a:t>
+              <a:t>    print</a:t>
             </a:r>
             <a:r>
               <a:rPr sz="1200">
@@ -9992,24 +9772,13 @@
             <a:r>
               <a:rPr sz="1200">
                 <a:solidFill>
-                  <a:srgbClr val="080808"/>
-                </a:solidFill>
-                <a:latin typeface="JetBrains Mono"/>
-                <a:ea typeface="JetBrains Mono"/>
-                <a:cs typeface="JetBrains Mono"/>
-              </a:rPr>
-              <a:t>    </a:t>
-            </a:r>
-            <a:r>
-              <a:rPr sz="1200">
-                <a:solidFill>
                   <a:srgbClr val="C45E00"/>
                 </a:solidFill>
                 <a:latin typeface="JetBrains Mono"/>
                 <a:ea typeface="JetBrains Mono"/>
                 <a:cs typeface="JetBrains Mono"/>
               </a:rPr>
-              <a:t>if</a:t>
+              <a:t>    if</a:t>
             </a:r>
             <a:r>
               <a:rPr sz="1200">
@@ -10057,24 +9826,13 @@
             <a:r>
               <a:rPr sz="1200">
                 <a:solidFill>
-                  <a:srgbClr val="080808"/>
-                </a:solidFill>
-                <a:latin typeface="JetBrains Mono"/>
-                <a:ea typeface="JetBrains Mono"/>
-                <a:cs typeface="JetBrains Mono"/>
-              </a:rPr>
-              <a:t>        </a:t>
-            </a:r>
-            <a:r>
-              <a:rPr sz="1200">
-                <a:solidFill>
                   <a:srgbClr val="1750EB"/>
                 </a:solidFill>
                 <a:latin typeface="JetBrains Mono"/>
                 <a:ea typeface="JetBrains Mono"/>
                 <a:cs typeface="JetBrains Mono"/>
               </a:rPr>
-              <a:t>print</a:t>
+              <a:t>        print</a:t>
             </a:r>
             <a:r>
               <a:rPr sz="1200">
@@ -10187,24 +9945,13 @@
             <a:r>
               <a:rPr sz="1200">
                 <a:solidFill>
-                  <a:srgbClr val="080808"/>
-                </a:solidFill>
-                <a:latin typeface="JetBrains Mono"/>
-                <a:ea typeface="JetBrains Mono"/>
-                <a:cs typeface="JetBrains Mono"/>
-              </a:rPr>
-              <a:t> </a:t>
-            </a:r>
-            <a:r>
-              <a:rPr sz="1200">
-                <a:solidFill>
                   <a:srgbClr val="C45E00"/>
                 </a:solidFill>
                 <a:latin typeface="JetBrains Mono"/>
                 <a:ea typeface="JetBrains Mono"/>
                 <a:cs typeface="JetBrains Mono"/>
               </a:rPr>
-              <a:t>False</a:t>
+              <a:t> False</a:t>
             </a:r>
             <a:r>
               <a:rPr sz="1200">
@@ -10230,24 +9977,13 @@
             <a:r>
               <a:rPr sz="1200">
                 <a:solidFill>
-                  <a:srgbClr val="080808"/>
-                </a:solidFill>
-                <a:latin typeface="JetBrains Mono"/>
-                <a:ea typeface="JetBrains Mono"/>
-                <a:cs typeface="JetBrains Mono"/>
-              </a:rPr>
-              <a:t>    </a:t>
-            </a:r>
-            <a:r>
-              <a:rPr sz="1200">
-                <a:solidFill>
                   <a:srgbClr val="1750EB"/>
                 </a:solidFill>
                 <a:latin typeface="JetBrains Mono"/>
                 <a:ea typeface="JetBrains Mono"/>
                 <a:cs typeface="JetBrains Mono"/>
               </a:rPr>
-              <a:t>print</a:t>
+              <a:t>    print</a:t>
             </a:r>
             <a:r>
               <a:rPr sz="1200">
@@ -11120,24 +10856,13 @@
             <a:r>
               <a:rPr sz="1200">
                 <a:solidFill>
-                  <a:srgbClr val="080808"/>
-                </a:solidFill>
-                <a:latin typeface="JetBrains Mono"/>
-                <a:ea typeface="JetBrains Mono"/>
-                <a:cs typeface="JetBrains Mono"/>
-              </a:rPr>
-              <a:t>    </a:t>
-            </a:r>
-            <a:r>
-              <a:rPr sz="1200">
-                <a:solidFill>
                   <a:srgbClr val="C45E00"/>
                 </a:solidFill>
                 <a:latin typeface="JetBrains Mono"/>
                 <a:ea typeface="JetBrains Mono"/>
                 <a:cs typeface="JetBrains Mono"/>
               </a:rPr>
-              <a:t>if</a:t>
+              <a:t>    if</a:t>
             </a:r>
             <a:r>
               <a:rPr sz="1200">
@@ -11185,24 +10910,13 @@
             <a:r>
               <a:rPr sz="1200">
                 <a:solidFill>
-                  <a:srgbClr val="080808"/>
-                </a:solidFill>
-                <a:latin typeface="JetBrains Mono"/>
-                <a:ea typeface="JetBrains Mono"/>
-                <a:cs typeface="JetBrains Mono"/>
-              </a:rPr>
-              <a:t>        </a:t>
-            </a:r>
-            <a:r>
-              <a:rPr sz="1200">
-                <a:solidFill>
                   <a:srgbClr val="1750EB"/>
                 </a:solidFill>
                 <a:latin typeface="JetBrains Mono"/>
                 <a:ea typeface="JetBrains Mono"/>
                 <a:cs typeface="JetBrains Mono"/>
               </a:rPr>
-              <a:t>print</a:t>
+              <a:t>        print</a:t>
             </a:r>
             <a:r>
               <a:rPr sz="1200">
@@ -11315,24 +11029,13 @@
             <a:r>
               <a:rPr sz="1200">
                 <a:solidFill>
-                  <a:srgbClr val="080808"/>
-                </a:solidFill>
-                <a:latin typeface="JetBrains Mono"/>
-                <a:ea typeface="JetBrains Mono"/>
-                <a:cs typeface="JetBrains Mono"/>
-              </a:rPr>
-              <a:t> </a:t>
-            </a:r>
-            <a:r>
-              <a:rPr sz="1200">
-                <a:solidFill>
                   <a:srgbClr val="C45E00"/>
                 </a:solidFill>
                 <a:latin typeface="JetBrains Mono"/>
                 <a:ea typeface="JetBrains Mono"/>
                 <a:cs typeface="JetBrains Mono"/>
               </a:rPr>
-              <a:t>False</a:t>
+              <a:t> False</a:t>
             </a:r>
             <a:r>
               <a:rPr sz="1200">
@@ -11358,24 +11061,13 @@
             <a:r>
               <a:rPr sz="1200">
                 <a:solidFill>
-                  <a:srgbClr val="080808"/>
-                </a:solidFill>
-                <a:latin typeface="JetBrains Mono"/>
-                <a:ea typeface="JetBrains Mono"/>
-                <a:cs typeface="JetBrains Mono"/>
-              </a:rPr>
-              <a:t>    </a:t>
-            </a:r>
-            <a:r>
-              <a:rPr sz="1200">
-                <a:solidFill>
                   <a:srgbClr val="1750EB"/>
                 </a:solidFill>
                 <a:latin typeface="JetBrains Mono"/>
                 <a:ea typeface="JetBrains Mono"/>
                 <a:cs typeface="JetBrains Mono"/>
               </a:rPr>
-              <a:t>print</a:t>
+              <a:t>    print</a:t>
             </a:r>
             <a:r>
               <a:rPr sz="1200">
@@ -11721,24 +11413,13 @@
             <a:r>
               <a:rPr sz="1800">
                 <a:solidFill>
-                  <a:srgbClr val="080808"/>
-                </a:solidFill>
-                <a:latin typeface="JetBrains Mono"/>
-                <a:ea typeface="JetBrains Mono"/>
-                <a:cs typeface="JetBrains Mono"/>
-              </a:rPr>
-              <a:t>    </a:t>
-            </a:r>
-            <a:r>
-              <a:rPr sz="1800">
-                <a:solidFill>
                   <a:srgbClr val="C45E00"/>
                 </a:solidFill>
                 <a:latin typeface="JetBrains Mono"/>
                 <a:ea typeface="JetBrains Mono"/>
                 <a:cs typeface="JetBrains Mono"/>
               </a:rPr>
-              <a:t>if</a:t>
+              <a:t>    if</a:t>
             </a:r>
             <a:r>
               <a:rPr sz="1800">
@@ -11806,24 +11487,13 @@
             <a:r>
               <a:rPr sz="1800">
                 <a:solidFill>
-                  <a:srgbClr val="080808"/>
-                </a:solidFill>
-                <a:latin typeface="JetBrains Mono"/>
-                <a:ea typeface="JetBrains Mono"/>
-                <a:cs typeface="JetBrains Mono"/>
-              </a:rPr>
-              <a:t> </a:t>
-            </a:r>
-            <a:r>
-              <a:rPr sz="1800">
-                <a:solidFill>
                   <a:srgbClr val="C45E00"/>
                 </a:solidFill>
                 <a:latin typeface="JetBrains Mono"/>
                 <a:ea typeface="JetBrains Mono"/>
                 <a:cs typeface="JetBrains Mono"/>
               </a:rPr>
-              <a:t>True</a:t>
+              <a:t> True</a:t>
             </a:r>
           </a:p>
           <a:p xmlns:a="http://schemas.openxmlformats.org/drawingml/2006/main">
@@ -11836,24 +11506,13 @@
             <a:r>
               <a:rPr sz="1800">
                 <a:solidFill>
-                  <a:srgbClr val="080808"/>
-                </a:solidFill>
-                <a:latin typeface="JetBrains Mono"/>
-                <a:ea typeface="JetBrains Mono"/>
-                <a:cs typeface="JetBrains Mono"/>
-              </a:rPr>
-              <a:t>    </a:t>
-            </a:r>
-            <a:r>
-              <a:rPr sz="1800">
-                <a:solidFill>
                   <a:srgbClr val="C45E00"/>
                 </a:solidFill>
                 <a:latin typeface="JetBrains Mono"/>
                 <a:ea typeface="JetBrains Mono"/>
                 <a:cs typeface="JetBrains Mono"/>
               </a:rPr>
-              <a:t>if</a:t>
+              <a:t>    if</a:t>
             </a:r>
             <a:r>
               <a:rPr sz="1800">
@@ -11880,24 +11539,13 @@
             <a:r>
               <a:rPr sz="1800">
                 <a:solidFill>
-                  <a:srgbClr val="080808"/>
-                </a:solidFill>
-                <a:latin typeface="JetBrains Mono"/>
-                <a:ea typeface="JetBrains Mono"/>
-                <a:cs typeface="JetBrains Mono"/>
-              </a:rPr>
-              <a:t> </a:t>
-            </a:r>
-            <a:r>
-              <a:rPr sz="1800">
-                <a:solidFill>
                   <a:srgbClr val="C45E00"/>
                 </a:solidFill>
                 <a:latin typeface="JetBrains Mono"/>
                 <a:ea typeface="JetBrains Mono"/>
                 <a:cs typeface="JetBrains Mono"/>
               </a:rPr>
-              <a:t>False</a:t>
+              <a:t> False</a:t>
             </a:r>
             <a:r>
               <a:rPr sz="1800">
@@ -11921,24 +11569,13 @@
             <a:r>
               <a:rPr sz="1800">
                 <a:solidFill>
-                  <a:srgbClr val="080808"/>
-                </a:solidFill>
-                <a:latin typeface="JetBrains Mono"/>
-                <a:ea typeface="JetBrains Mono"/>
-                <a:cs typeface="JetBrains Mono"/>
-              </a:rPr>
-              <a:t>        </a:t>
-            </a:r>
-            <a:r>
-              <a:rPr sz="1800">
-                <a:solidFill>
                   <a:srgbClr val="1750EB"/>
                 </a:solidFill>
                 <a:latin typeface="JetBrains Mono"/>
                 <a:ea typeface="JetBrains Mono"/>
                 <a:cs typeface="JetBrains Mono"/>
               </a:rPr>
-              <a:t>print</a:t>
+              <a:t>        print</a:t>
             </a:r>
             <a:r>
               <a:rPr sz="1800">
